--- a/TEACHING/files/2019/1107/hari_aml.pptx
+++ b/TEACHING/files/2019/1107/hari_aml.pptx
@@ -8,32 +8,35 @@
     <p:sldId id="313" r:id="rId2"/>
     <p:sldId id="288" r:id="rId3"/>
     <p:sldId id="260" r:id="rId4"/>
-    <p:sldId id="258" r:id="rId5"/>
-    <p:sldId id="290" r:id="rId6"/>
-    <p:sldId id="298" r:id="rId7"/>
-    <p:sldId id="297" r:id="rId8"/>
-    <p:sldId id="301" r:id="rId9"/>
-    <p:sldId id="300" r:id="rId10"/>
-    <p:sldId id="299" r:id="rId11"/>
-    <p:sldId id="291" r:id="rId12"/>
-    <p:sldId id="292" r:id="rId13"/>
-    <p:sldId id="295" r:id="rId14"/>
-    <p:sldId id="293" r:id="rId15"/>
-    <p:sldId id="306" r:id="rId16"/>
-    <p:sldId id="259" r:id="rId17"/>
-    <p:sldId id="307" r:id="rId18"/>
-    <p:sldId id="303" r:id="rId19"/>
-    <p:sldId id="304" r:id="rId20"/>
-    <p:sldId id="257" r:id="rId21"/>
-    <p:sldId id="294" r:id="rId22"/>
-    <p:sldId id="308" r:id="rId23"/>
-    <p:sldId id="305" r:id="rId24"/>
-    <p:sldId id="296" r:id="rId25"/>
-    <p:sldId id="312" r:id="rId26"/>
-    <p:sldId id="311" r:id="rId27"/>
-    <p:sldId id="309" r:id="rId28"/>
-    <p:sldId id="310" r:id="rId29"/>
-    <p:sldId id="314" r:id="rId30"/>
+    <p:sldId id="315" r:id="rId5"/>
+    <p:sldId id="258" r:id="rId6"/>
+    <p:sldId id="290" r:id="rId7"/>
+    <p:sldId id="298" r:id="rId8"/>
+    <p:sldId id="297" r:id="rId9"/>
+    <p:sldId id="316" r:id="rId10"/>
+    <p:sldId id="300" r:id="rId11"/>
+    <p:sldId id="299" r:id="rId12"/>
+    <p:sldId id="301" r:id="rId13"/>
+    <p:sldId id="291" r:id="rId14"/>
+    <p:sldId id="292" r:id="rId15"/>
+    <p:sldId id="295" r:id="rId16"/>
+    <p:sldId id="317" r:id="rId17"/>
+    <p:sldId id="293" r:id="rId18"/>
+    <p:sldId id="306" r:id="rId19"/>
+    <p:sldId id="259" r:id="rId20"/>
+    <p:sldId id="303" r:id="rId21"/>
+    <p:sldId id="307" r:id="rId22"/>
+    <p:sldId id="304" r:id="rId23"/>
+    <p:sldId id="257" r:id="rId24"/>
+    <p:sldId id="294" r:id="rId25"/>
+    <p:sldId id="308" r:id="rId26"/>
+    <p:sldId id="305" r:id="rId27"/>
+    <p:sldId id="296" r:id="rId28"/>
+    <p:sldId id="312" r:id="rId29"/>
+    <p:sldId id="311" r:id="rId30"/>
+    <p:sldId id="309" r:id="rId31"/>
+    <p:sldId id="310" r:id="rId32"/>
+    <p:sldId id="314" r:id="rId33"/>
   </p:sldIdLst>
   <p:sldSz cx="12192000" cy="6858000"/>
   <p:notesSz cx="6858000" cy="9144000"/>
@@ -299,7 +302,7 @@
           <a:p>
             <a:fld id="{BC7E31B9-159D-4EB3-B4D8-25E2B65BB27C}" type="datetimeFigureOut">
               <a:rPr lang="en-US" smtClean="0"/>
-              <a:t>10/31/19</a:t>
+              <a:t>11/6/19</a:t>
             </a:fld>
             <a:endParaRPr lang="en-US"/>
           </a:p>
@@ -497,7 +500,7 @@
           <a:p>
             <a:fld id="{BC7E31B9-159D-4EB3-B4D8-25E2B65BB27C}" type="datetimeFigureOut">
               <a:rPr lang="en-US" smtClean="0"/>
-              <a:t>10/31/19</a:t>
+              <a:t>11/6/19</a:t>
             </a:fld>
             <a:endParaRPr lang="en-US"/>
           </a:p>
@@ -705,7 +708,7 @@
           <a:p>
             <a:fld id="{BC7E31B9-159D-4EB3-B4D8-25E2B65BB27C}" type="datetimeFigureOut">
               <a:rPr lang="en-US" smtClean="0"/>
-              <a:t>10/31/19</a:t>
+              <a:t>11/6/19</a:t>
             </a:fld>
             <a:endParaRPr lang="en-US"/>
           </a:p>
@@ -903,7 +906,7 @@
           <a:p>
             <a:fld id="{BC7E31B9-159D-4EB3-B4D8-25E2B65BB27C}" type="datetimeFigureOut">
               <a:rPr lang="en-US" smtClean="0"/>
-              <a:t>10/31/19</a:t>
+              <a:t>11/6/19</a:t>
             </a:fld>
             <a:endParaRPr lang="en-US"/>
           </a:p>
@@ -1178,7 +1181,7 @@
           <a:p>
             <a:fld id="{BC7E31B9-159D-4EB3-B4D8-25E2B65BB27C}" type="datetimeFigureOut">
               <a:rPr lang="en-US" smtClean="0"/>
-              <a:t>10/31/19</a:t>
+              <a:t>11/6/19</a:t>
             </a:fld>
             <a:endParaRPr lang="en-US"/>
           </a:p>
@@ -1443,7 +1446,7 @@
           <a:p>
             <a:fld id="{BC7E31B9-159D-4EB3-B4D8-25E2B65BB27C}" type="datetimeFigureOut">
               <a:rPr lang="en-US" smtClean="0"/>
-              <a:t>10/31/19</a:t>
+              <a:t>11/6/19</a:t>
             </a:fld>
             <a:endParaRPr lang="en-US"/>
           </a:p>
@@ -1855,7 +1858,7 @@
           <a:p>
             <a:fld id="{BC7E31B9-159D-4EB3-B4D8-25E2B65BB27C}" type="datetimeFigureOut">
               <a:rPr lang="en-US" smtClean="0"/>
-              <a:t>10/31/19</a:t>
+              <a:t>11/6/19</a:t>
             </a:fld>
             <a:endParaRPr lang="en-US"/>
           </a:p>
@@ -1996,7 +1999,7 @@
           <a:p>
             <a:fld id="{BC7E31B9-159D-4EB3-B4D8-25E2B65BB27C}" type="datetimeFigureOut">
               <a:rPr lang="en-US" smtClean="0"/>
-              <a:t>10/31/19</a:t>
+              <a:t>11/6/19</a:t>
             </a:fld>
             <a:endParaRPr lang="en-US"/>
           </a:p>
@@ -2109,7 +2112,7 @@
           <a:p>
             <a:fld id="{BC7E31B9-159D-4EB3-B4D8-25E2B65BB27C}" type="datetimeFigureOut">
               <a:rPr lang="en-US" smtClean="0"/>
-              <a:t>10/31/19</a:t>
+              <a:t>11/6/19</a:t>
             </a:fld>
             <a:endParaRPr lang="en-US"/>
           </a:p>
@@ -2420,7 +2423,7 @@
           <a:p>
             <a:fld id="{BC7E31B9-159D-4EB3-B4D8-25E2B65BB27C}" type="datetimeFigureOut">
               <a:rPr lang="en-US" smtClean="0"/>
-              <a:t>10/31/19</a:t>
+              <a:t>11/6/19</a:t>
             </a:fld>
             <a:endParaRPr lang="en-US"/>
           </a:p>
@@ -2708,7 +2711,7 @@
           <a:p>
             <a:fld id="{BC7E31B9-159D-4EB3-B4D8-25E2B65BB27C}" type="datetimeFigureOut">
               <a:rPr lang="en-US" smtClean="0"/>
-              <a:t>10/31/19</a:t>
+              <a:t>11/6/19</a:t>
             </a:fld>
             <a:endParaRPr lang="en-US"/>
           </a:p>
@@ -2949,7 +2952,7 @@
           <a:p>
             <a:fld id="{BC7E31B9-159D-4EB3-B4D8-25E2B65BB27C}" type="datetimeFigureOut">
               <a:rPr lang="en-US" smtClean="0"/>
-              <a:t>10/31/19</a:t>
+              <a:t>11/6/19</a:t>
             </a:fld>
             <a:endParaRPr lang="en-US"/>
           </a:p>
@@ -3396,6 +3399,46 @@
           </a:prstGeom>
         </p:spPr>
       </p:pic>
+      <p:sp>
+        <p:nvSpPr>
+          <p:cNvPr id="2" name="TextBox 1">
+            <a:extLst>
+              <a:ext uri="{FF2B5EF4-FFF2-40B4-BE49-F238E27FC236}">
+                <a16:creationId xmlns:a16="http://schemas.microsoft.com/office/drawing/2014/main" id="{708B1047-5EF2-A94E-9769-D7020F5DB6DB}"/>
+              </a:ext>
+            </a:extLst>
+          </p:cNvPr>
+          <p:cNvSpPr txBox="1"/>
+          <p:nvPr/>
+        </p:nvSpPr>
+        <p:spPr>
+          <a:xfrm>
+            <a:off x="4718462" y="5272644"/>
+            <a:ext cx="2755076" cy="369332"/>
+          </a:xfrm>
+          <a:prstGeom prst="rect">
+            <a:avLst/>
+          </a:prstGeom>
+          <a:noFill/>
+        </p:spPr>
+        <p:txBody>
+          <a:bodyPr wrap="square" rtlCol="0">
+            <a:spAutoFit/>
+          </a:bodyPr>
+          <a:lstStyle/>
+          <a:p>
+            <a:r>
+              <a:rPr lang="en-US" dirty="0"/>
+              <a:t>Presented By: Hari </a:t>
+            </a:r>
+            <a:r>
+              <a:rPr lang="en-US" dirty="0" err="1"/>
+              <a:t>Cheruvu</a:t>
+            </a:r>
+            <a:endParaRPr lang="en-US" dirty="0"/>
+          </a:p>
+        </p:txBody>
+      </p:sp>
     </p:spTree>
     <p:extLst>
       <p:ext uri="{BB962C8B-B14F-4D97-AF65-F5344CB8AC3E}">
@@ -3410,6 +3453,391 @@
 </file>
 
 <file path=ppt/slides/slide10.xml><?xml version="1.0" encoding="utf-8"?>
+<p:sld xmlns:a="http://schemas.openxmlformats.org/drawingml/2006/main" xmlns:r="http://schemas.openxmlformats.org/officeDocument/2006/relationships" xmlns:p="http://schemas.openxmlformats.org/presentationml/2006/main">
+  <p:cSld>
+    <p:spTree>
+      <p:nvGrpSpPr>
+        <p:cNvPr id="1" name=""/>
+        <p:cNvGrpSpPr/>
+        <p:nvPr/>
+      </p:nvGrpSpPr>
+      <p:grpSpPr>
+        <a:xfrm>
+          <a:off x="0" y="0"/>
+          <a:ext cx="0" cy="0"/>
+          <a:chOff x="0" y="0"/>
+          <a:chExt cx="0" cy="0"/>
+        </a:xfrm>
+      </p:grpSpPr>
+      <p:sp>
+        <p:nvSpPr>
+          <p:cNvPr id="2" name="Title 1">
+            <a:extLst>
+              <a:ext uri="{FF2B5EF4-FFF2-40B4-BE49-F238E27FC236}">
+                <a16:creationId xmlns:a16="http://schemas.microsoft.com/office/drawing/2014/main" id="{C43868BE-8F41-4248-94C0-54C87BAE1CCE}"/>
+              </a:ext>
+            </a:extLst>
+          </p:cNvPr>
+          <p:cNvSpPr>
+            <a:spLocks noGrp="1"/>
+          </p:cNvSpPr>
+          <p:nvPr>
+            <p:ph type="title"/>
+          </p:nvPr>
+        </p:nvSpPr>
+        <p:spPr/>
+        <p:txBody>
+          <a:bodyPr/>
+          <a:lstStyle/>
+          <a:p>
+            <a:pPr algn="ctr"/>
+            <a:r>
+              <a:rPr lang="en-US" dirty="0"/>
+              <a:t>Preliminary Definitions</a:t>
+            </a:r>
+          </a:p>
+        </p:txBody>
+      </p:sp>
+      <p:pic>
+        <p:nvPicPr>
+          <p:cNvPr id="4" name="Picture 3">
+            <a:extLst>
+              <a:ext uri="{FF2B5EF4-FFF2-40B4-BE49-F238E27FC236}">
+                <a16:creationId xmlns:a16="http://schemas.microsoft.com/office/drawing/2014/main" id="{449DF8AB-8297-A845-ACD4-BB93BD80CCA3}"/>
+              </a:ext>
+            </a:extLst>
+          </p:cNvPr>
+          <p:cNvPicPr>
+            <a:picLocks noChangeAspect="1"/>
+          </p:cNvPicPr>
+          <p:nvPr/>
+        </p:nvPicPr>
+        <p:blipFill>
+          <a:blip r:embed="rId2"/>
+          <a:stretch>
+            <a:fillRect/>
+          </a:stretch>
+        </p:blipFill>
+        <p:spPr>
+          <a:xfrm>
+            <a:off x="2988527" y="2417800"/>
+            <a:ext cx="6810236" cy="1011200"/>
+          </a:xfrm>
+          <a:prstGeom prst="rect">
+            <a:avLst/>
+          </a:prstGeom>
+        </p:spPr>
+      </p:pic>
+      <mc:AlternateContent xmlns:mc="http://schemas.openxmlformats.org/markup-compatibility/2006" xmlns:a14="http://schemas.microsoft.com/office/drawing/2010/main">
+        <mc:Choice Requires="a14">
+          <p:sp>
+            <p:nvSpPr>
+              <p:cNvPr id="5" name="TextBox 4">
+                <a:extLst>
+                  <a:ext uri="{FF2B5EF4-FFF2-40B4-BE49-F238E27FC236}">
+                    <a16:creationId xmlns:a16="http://schemas.microsoft.com/office/drawing/2014/main" id="{44ECC9EB-3FAB-7144-9D01-6F64D2C48284}"/>
+                  </a:ext>
+                </a:extLst>
+              </p:cNvPr>
+              <p:cNvSpPr txBox="1"/>
+              <p:nvPr/>
+            </p:nvSpPr>
+            <p:spPr>
+              <a:xfrm>
+                <a:off x="825190" y="2752297"/>
+                <a:ext cx="2308303" cy="369332"/>
+              </a:xfrm>
+              <a:prstGeom prst="rect">
+                <a:avLst/>
+              </a:prstGeom>
+              <a:noFill/>
+            </p:spPr>
+            <p:txBody>
+              <a:bodyPr wrap="square" rtlCol="0">
+                <a:spAutoFit/>
+              </a:bodyPr>
+              <a:lstStyle/>
+              <a:p>
+                <a:r>
+                  <a:rPr lang="en-US" dirty="0"/>
+                  <a:t>Privacy Loss at </a:t>
+                </a:r>
+                <a14:m>
+                  <m:oMath xmlns:m="http://schemas.openxmlformats.org/officeDocument/2006/math">
+                    <m:r>
+                      <a:rPr lang="en-US" b="0" i="1" smtClean="0">
+                        <a:latin typeface="Cambria Math" panose="02040503050406030204" pitchFamily="18" charset="0"/>
+                      </a:rPr>
+                      <m:t>𝑜</m:t>
+                    </m:r>
+                    <m:r>
+                      <a:rPr lang="en-US" b="0" i="1" smtClean="0">
+                        <a:latin typeface="Cambria Math" panose="02040503050406030204" pitchFamily="18" charset="0"/>
+                      </a:rPr>
+                      <m:t>:</m:t>
+                    </m:r>
+                  </m:oMath>
+                </a14:m>
+                <a:endParaRPr lang="en-US" b="0" dirty="0"/>
+              </a:p>
+            </p:txBody>
+          </p:sp>
+        </mc:Choice>
+        <mc:Fallback xmlns="">
+          <p:sp>
+            <p:nvSpPr>
+              <p:cNvPr id="5" name="TextBox 4">
+                <a:extLst>
+                  <a:ext uri="{FF2B5EF4-FFF2-40B4-BE49-F238E27FC236}">
+                    <a16:creationId xmlns:a16="http://schemas.microsoft.com/office/drawing/2014/main" id="{44ECC9EB-3FAB-7144-9D01-6F64D2C48284}"/>
+                  </a:ext>
+                </a:extLst>
+              </p:cNvPr>
+              <p:cNvSpPr txBox="1">
+                <a:spLocks noRot="1" noChangeAspect="1" noMove="1" noResize="1" noEditPoints="1" noAdjustHandles="1" noChangeArrowheads="1" noChangeShapeType="1" noTextEdit="1"/>
+              </p:cNvSpPr>
+              <p:nvPr/>
+            </p:nvSpPr>
+            <p:spPr>
+              <a:xfrm>
+                <a:off x="825190" y="2752297"/>
+                <a:ext cx="2308303" cy="369332"/>
+              </a:xfrm>
+              <a:prstGeom prst="rect">
+                <a:avLst/>
+              </a:prstGeom>
+              <a:blipFill>
+                <a:blip r:embed="rId3"/>
+                <a:stretch>
+                  <a:fillRect l="-2186" t="-6667" b="-23333"/>
+                </a:stretch>
+              </a:blipFill>
+            </p:spPr>
+            <p:txBody>
+              <a:bodyPr/>
+              <a:lstStyle/>
+              <a:p>
+                <a:r>
+                  <a:rPr lang="en-US">
+                    <a:noFill/>
+                  </a:rPr>
+                  <a:t> </a:t>
+                </a:r>
+              </a:p>
+            </p:txBody>
+          </p:sp>
+        </mc:Fallback>
+      </mc:AlternateContent>
+      <mc:AlternateContent xmlns:mc="http://schemas.openxmlformats.org/markup-compatibility/2006">
+        <mc:Choice xmlns:a14="http://schemas.microsoft.com/office/drawing/2010/main" Requires="a14">
+          <p:sp>
+            <p:nvSpPr>
+              <p:cNvPr id="7" name="TextBox 6">
+                <a:extLst>
+                  <a:ext uri="{FF2B5EF4-FFF2-40B4-BE49-F238E27FC236}">
+                    <a16:creationId xmlns:a16="http://schemas.microsoft.com/office/drawing/2014/main" id="{16445E57-BE1C-6847-9B15-F91410591E92}"/>
+                  </a:ext>
+                </a:extLst>
+              </p:cNvPr>
+              <p:cNvSpPr txBox="1"/>
+              <p:nvPr/>
+            </p:nvSpPr>
+            <p:spPr>
+              <a:xfrm>
+                <a:off x="925551" y="3702205"/>
+                <a:ext cx="2062976" cy="2031325"/>
+              </a:xfrm>
+              <a:prstGeom prst="rect">
+                <a:avLst/>
+              </a:prstGeom>
+              <a:noFill/>
+            </p:spPr>
+            <p:txBody>
+              <a:bodyPr wrap="square" rtlCol="0">
+                <a:spAutoFit/>
+              </a:bodyPr>
+              <a:lstStyle/>
+              <a:p>
+                <a14:m>
+                  <m:oMath xmlns:m="http://schemas.openxmlformats.org/officeDocument/2006/math">
+                    <m:r>
+                      <m:rPr>
+                        <m:sty m:val="p"/>
+                      </m:rPr>
+                      <a:rPr lang="en-US" b="0" i="1" smtClean="0">
+                        <a:latin typeface="Cambria Math" panose="02040503050406030204" pitchFamily="18" charset="0"/>
+                      </a:rPr>
+                      <m:t>λ</m:t>
+                    </m:r>
+                  </m:oMath>
+                </a14:m>
+                <a:r>
+                  <a:rPr lang="en-US" b="0" dirty="0"/>
+                  <a:t>-th moment of </a:t>
+                </a:r>
+                <a14:m>
+                  <m:oMath xmlns:m="http://schemas.openxmlformats.org/officeDocument/2006/math">
+                    <m:r>
+                      <a:rPr lang="en-US" b="0" i="1" smtClean="0">
+                        <a:latin typeface="Cambria Math" panose="02040503050406030204" pitchFamily="18" charset="0"/>
+                      </a:rPr>
+                      <m:t>ℳ</m:t>
+                    </m:r>
+                  </m:oMath>
+                </a14:m>
+                <a:endParaRPr lang="en-US" b="0" dirty="0"/>
+              </a:p>
+              <a:p>
+                <a:r>
+                  <a:rPr lang="en-US" dirty="0"/>
+                  <a:t>is the log of the moment-generating function evaluated at </a:t>
+                </a:r>
+                <a14:m>
+                  <m:oMath xmlns:m="http://schemas.openxmlformats.org/officeDocument/2006/math">
+                    <m:r>
+                      <m:rPr>
+                        <m:sty m:val="p"/>
+                      </m:rPr>
+                      <a:rPr lang="en-US" b="0" i="1" smtClean="0">
+                        <a:latin typeface="Cambria Math" panose="02040503050406030204" pitchFamily="18" charset="0"/>
+                      </a:rPr>
+                      <m:t>λ</m:t>
+                    </m:r>
+                  </m:oMath>
+                </a14:m>
+                <a:endParaRPr lang="en-US" b="0" dirty="0"/>
+              </a:p>
+              <a:p>
+                <a:r>
+                  <a:rPr lang="en-US" b="0" dirty="0"/>
+                  <a:t>  </a:t>
+                </a:r>
+              </a:p>
+              <a:p>
+                <a:endParaRPr lang="en-US" b="0" dirty="0"/>
+              </a:p>
+            </p:txBody>
+          </p:sp>
+        </mc:Choice>
+        <mc:Fallback>
+          <p:sp>
+            <p:nvSpPr>
+              <p:cNvPr id="7" name="TextBox 6">
+                <a:extLst>
+                  <a:ext uri="{FF2B5EF4-FFF2-40B4-BE49-F238E27FC236}">
+                    <a16:creationId xmlns:a16="http://schemas.microsoft.com/office/drawing/2014/main" id="{16445E57-BE1C-6847-9B15-F91410591E92}"/>
+                  </a:ext>
+                </a:extLst>
+              </p:cNvPr>
+              <p:cNvSpPr txBox="1">
+                <a:spLocks noRot="1" noChangeAspect="1" noMove="1" noResize="1" noEditPoints="1" noAdjustHandles="1" noChangeArrowheads="1" noChangeShapeType="1" noTextEdit="1"/>
+              </p:cNvSpPr>
+              <p:nvPr/>
+            </p:nvSpPr>
+            <p:spPr>
+              <a:xfrm>
+                <a:off x="925551" y="3702205"/>
+                <a:ext cx="2062976" cy="2031325"/>
+              </a:xfrm>
+              <a:prstGeom prst="rect">
+                <a:avLst/>
+              </a:prstGeom>
+              <a:blipFill>
+                <a:blip r:embed="rId4"/>
+                <a:stretch>
+                  <a:fillRect l="-2454" t="-1250" r="-3681"/>
+                </a:stretch>
+              </a:blipFill>
+            </p:spPr>
+            <p:txBody>
+              <a:bodyPr/>
+              <a:lstStyle/>
+              <a:p>
+                <a:r>
+                  <a:rPr lang="en-US">
+                    <a:noFill/>
+                  </a:rPr>
+                  <a:t> </a:t>
+                </a:r>
+              </a:p>
+            </p:txBody>
+          </p:sp>
+        </mc:Fallback>
+      </mc:AlternateContent>
+      <p:pic>
+        <p:nvPicPr>
+          <p:cNvPr id="12" name="Picture 11">
+            <a:extLst>
+              <a:ext uri="{FF2B5EF4-FFF2-40B4-BE49-F238E27FC236}">
+                <a16:creationId xmlns:a16="http://schemas.microsoft.com/office/drawing/2014/main" id="{100DAD3F-3468-BE46-83FE-4414A09EFA7B}"/>
+              </a:ext>
+            </a:extLst>
+          </p:cNvPr>
+          <p:cNvPicPr>
+            <a:picLocks noChangeAspect="1"/>
+          </p:cNvPicPr>
+          <p:nvPr/>
+        </p:nvPicPr>
+        <p:blipFill>
+          <a:blip r:embed="rId5"/>
+          <a:stretch>
+            <a:fillRect/>
+          </a:stretch>
+        </p:blipFill>
+        <p:spPr>
+          <a:xfrm>
+            <a:off x="2988527" y="3439116"/>
+            <a:ext cx="8590665" cy="1234625"/>
+          </a:xfrm>
+          <a:prstGeom prst="rect">
+            <a:avLst/>
+          </a:prstGeom>
+        </p:spPr>
+      </p:pic>
+      <p:pic>
+        <p:nvPicPr>
+          <p:cNvPr id="13" name="Picture 12">
+            <a:extLst>
+              <a:ext uri="{FF2B5EF4-FFF2-40B4-BE49-F238E27FC236}">
+                <a16:creationId xmlns:a16="http://schemas.microsoft.com/office/drawing/2014/main" id="{BD9BB90C-120B-0547-AFEE-09A9D4CEEA07}"/>
+              </a:ext>
+            </a:extLst>
+          </p:cNvPr>
+          <p:cNvPicPr>
+            <a:picLocks noChangeAspect="1"/>
+          </p:cNvPicPr>
+          <p:nvPr/>
+        </p:nvPicPr>
+        <p:blipFill>
+          <a:blip r:embed="rId6"/>
+          <a:stretch>
+            <a:fillRect/>
+          </a:stretch>
+        </p:blipFill>
+        <p:spPr>
+          <a:xfrm>
+            <a:off x="2988527" y="5255556"/>
+            <a:ext cx="5429645" cy="967784"/>
+          </a:xfrm>
+          <a:prstGeom prst="rect">
+            <a:avLst/>
+          </a:prstGeom>
+        </p:spPr>
+      </p:pic>
+    </p:spTree>
+    <p:extLst>
+      <p:ext uri="{BB962C8B-B14F-4D97-AF65-F5344CB8AC3E}">
+        <p14:creationId xmlns:p14="http://schemas.microsoft.com/office/powerpoint/2010/main" val="3459330158"/>
+      </p:ext>
+    </p:extLst>
+  </p:cSld>
+  <p:clrMapOvr>
+    <a:masterClrMapping/>
+  </p:clrMapOvr>
+</p:sld>
+</file>
+
+<file path=ppt/slides/slide11.xml><?xml version="1.0" encoding="utf-8"?>
 <p:sld xmlns:a="http://schemas.openxmlformats.org/drawingml/2006/main" xmlns:r="http://schemas.openxmlformats.org/officeDocument/2006/relationships" xmlns:p="http://schemas.openxmlformats.org/presentationml/2006/main">
   <p:cSld>
     <p:spTree>
@@ -3573,7 +4001,7 @@
         </p:nvCxnSpPr>
         <p:spPr>
           <a:xfrm flipV="1">
-            <a:off x="6096000" y="4811459"/>
+            <a:off x="6096000" y="4348876"/>
             <a:ext cx="1025236" cy="1025236"/>
           </a:xfrm>
           <a:prstGeom prst="straightConnector1">
@@ -3611,7 +4039,7 @@
 </p:sld>
 </file>
 
-<file path=ppt/slides/slide11.xml><?xml version="1.0" encoding="utf-8"?>
+<file path=ppt/slides/slide12.xml><?xml version="1.0" encoding="utf-8"?>
 <p:sld xmlns:a="http://schemas.openxmlformats.org/drawingml/2006/main" xmlns:r="http://schemas.openxmlformats.org/officeDocument/2006/relationships" xmlns:p="http://schemas.openxmlformats.org/presentationml/2006/main">
   <p:cSld>
     <p:spTree>
@@ -3633,7 +4061,7 @@
           <p:cNvPr id="2" name="Title 1">
             <a:extLst>
               <a:ext uri="{FF2B5EF4-FFF2-40B4-BE49-F238E27FC236}">
-                <a16:creationId xmlns:a16="http://schemas.microsoft.com/office/drawing/2014/main" id="{A1F053E7-4613-814E-BB0C-1B4CC5755FBA}"/>
+                <a16:creationId xmlns:a16="http://schemas.microsoft.com/office/drawing/2014/main" id="{7C52B8B9-0ABB-7B46-8201-19BE5174F4E1}"/>
               </a:ext>
             </a:extLst>
           </p:cNvPr>
@@ -3651,26 +4079,52 @@
           <a:p>
             <a:r>
               <a:rPr lang="en-US" dirty="0"/>
-              <a:t>Accuracy vs Epsilon for MNIST Classification</a:t>
+              <a:t>Key Contribution is Obtaining a Tighter Bound</a:t>
+            </a:r>
+          </a:p>
+        </p:txBody>
+      </p:sp>
+      <p:sp>
+        <p:nvSpPr>
+          <p:cNvPr id="3" name="Content Placeholder 2">
+            <a:extLst>
+              <a:ext uri="{FF2B5EF4-FFF2-40B4-BE49-F238E27FC236}">
+                <a16:creationId xmlns:a16="http://schemas.microsoft.com/office/drawing/2014/main" id="{BBC2A1AF-499C-334D-BC91-A60B0BF1290D}"/>
+              </a:ext>
+            </a:extLst>
+          </p:cNvPr>
+          <p:cNvSpPr>
+            <a:spLocks noGrp="1"/>
+          </p:cNvSpPr>
+          <p:nvPr>
+            <p:ph idx="1"/>
+          </p:nvPr>
+        </p:nvSpPr>
+        <p:spPr/>
+        <p:txBody>
+          <a:bodyPr/>
+          <a:lstStyle/>
+          <a:p>
+            <a:r>
+              <a:rPr lang="en-US" dirty="0"/>
+              <a:t>Solution: Use Moments Accountant to obtain this tighter bound</a:t>
             </a:r>
           </a:p>
         </p:txBody>
       </p:sp>
       <p:pic>
         <p:nvPicPr>
-          <p:cNvPr id="4" name="Content Placeholder 3">
-            <a:extLst>
-              <a:ext uri="{FF2B5EF4-FFF2-40B4-BE49-F238E27FC236}">
-                <a16:creationId xmlns:a16="http://schemas.microsoft.com/office/drawing/2014/main" id="{419C4E19-5F46-A44D-8B54-B59B60A0E9F8}"/>
+          <p:cNvPr id="5" name="Picture 4">
+            <a:extLst>
+              <a:ext uri="{FF2B5EF4-FFF2-40B4-BE49-F238E27FC236}">
+                <a16:creationId xmlns:a16="http://schemas.microsoft.com/office/drawing/2014/main" id="{2B1EFE71-0F29-E144-871E-52945A2EF64B}"/>
               </a:ext>
             </a:extLst>
           </p:cNvPr>
           <p:cNvPicPr>
-            <a:picLocks noGrp="1" noChangeAspect="1"/>
+            <a:picLocks noChangeAspect="1"/>
           </p:cNvPicPr>
-          <p:nvPr>
-            <p:ph idx="1"/>
-          </p:nvPr>
+          <p:nvPr/>
         </p:nvPicPr>
         <p:blipFill>
           <a:blip r:embed="rId2"/>
@@ -3680,7 +4134,97 @@
         </p:blipFill>
         <p:spPr>
           <a:xfrm>
-            <a:off x="3385882" y="1825625"/>
+            <a:off x="1804236" y="2861632"/>
+            <a:ext cx="8583528" cy="3315331"/>
+          </a:xfrm>
+          <a:prstGeom prst="rect">
+            <a:avLst/>
+          </a:prstGeom>
+        </p:spPr>
+      </p:pic>
+    </p:spTree>
+    <p:extLst>
+      <p:ext uri="{BB962C8B-B14F-4D97-AF65-F5344CB8AC3E}">
+        <p14:creationId xmlns:p14="http://schemas.microsoft.com/office/powerpoint/2010/main" val="2298333675"/>
+      </p:ext>
+    </p:extLst>
+  </p:cSld>
+  <p:clrMapOvr>
+    <a:masterClrMapping/>
+  </p:clrMapOvr>
+</p:sld>
+</file>
+
+<file path=ppt/slides/slide13.xml><?xml version="1.0" encoding="utf-8"?>
+<p:sld xmlns:a="http://schemas.openxmlformats.org/drawingml/2006/main" xmlns:r="http://schemas.openxmlformats.org/officeDocument/2006/relationships" xmlns:p="http://schemas.openxmlformats.org/presentationml/2006/main">
+  <p:cSld>
+    <p:spTree>
+      <p:nvGrpSpPr>
+        <p:cNvPr id="1" name=""/>
+        <p:cNvGrpSpPr/>
+        <p:nvPr/>
+      </p:nvGrpSpPr>
+      <p:grpSpPr>
+        <a:xfrm>
+          <a:off x="0" y="0"/>
+          <a:ext cx="0" cy="0"/>
+          <a:chOff x="0" y="0"/>
+          <a:chExt cx="0" cy="0"/>
+        </a:xfrm>
+      </p:grpSpPr>
+      <p:sp>
+        <p:nvSpPr>
+          <p:cNvPr id="2" name="Title 1">
+            <a:extLst>
+              <a:ext uri="{FF2B5EF4-FFF2-40B4-BE49-F238E27FC236}">
+                <a16:creationId xmlns:a16="http://schemas.microsoft.com/office/drawing/2014/main" id="{A1F053E7-4613-814E-BB0C-1B4CC5755FBA}"/>
+              </a:ext>
+            </a:extLst>
+          </p:cNvPr>
+          <p:cNvSpPr>
+            <a:spLocks noGrp="1"/>
+          </p:cNvSpPr>
+          <p:nvPr>
+            <p:ph type="title"/>
+          </p:nvPr>
+        </p:nvSpPr>
+        <p:spPr/>
+        <p:txBody>
+          <a:bodyPr/>
+          <a:lstStyle/>
+          <a:p>
+            <a:r>
+              <a:rPr lang="en-US" dirty="0"/>
+              <a:t>Accuracy vs Epsilon for MNIST Classification</a:t>
+            </a:r>
+          </a:p>
+        </p:txBody>
+      </p:sp>
+      <p:pic>
+        <p:nvPicPr>
+          <p:cNvPr id="4" name="Content Placeholder 3">
+            <a:extLst>
+              <a:ext uri="{FF2B5EF4-FFF2-40B4-BE49-F238E27FC236}">
+                <a16:creationId xmlns:a16="http://schemas.microsoft.com/office/drawing/2014/main" id="{419C4E19-5F46-A44D-8B54-B59B60A0E9F8}"/>
+              </a:ext>
+            </a:extLst>
+          </p:cNvPr>
+          <p:cNvPicPr>
+            <a:picLocks noGrp="1" noChangeAspect="1"/>
+          </p:cNvPicPr>
+          <p:nvPr>
+            <p:ph idx="1"/>
+          </p:nvPr>
+        </p:nvPicPr>
+        <p:blipFill>
+          <a:blip r:embed="rId2"/>
+          <a:stretch>
+            <a:fillRect/>
+          </a:stretch>
+        </p:blipFill>
+        <p:spPr>
+          <a:xfrm>
+            <a:off x="3385882" y="1690688"/>
             <a:ext cx="5420235" cy="4351338"/>
           </a:xfrm>
           <a:prstGeom prst="rect">
@@ -3701,7 +4245,7 @@
 </p:sld>
 </file>
 
-<file path=ppt/slides/slide12.xml><?xml version="1.0" encoding="utf-8"?>
+<file path=ppt/slides/slide14.xml><?xml version="1.0" encoding="utf-8"?>
 <p:sld xmlns:a="http://schemas.openxmlformats.org/drawingml/2006/main" xmlns:r="http://schemas.openxmlformats.org/officeDocument/2006/relationships" xmlns:p="http://schemas.openxmlformats.org/presentationml/2006/main">
   <p:cSld>
     <p:spTree>
@@ -3825,7 +4369,7 @@
 </p:sld>
 </file>
 
-<file path=ppt/slides/slide13.xml><?xml version="1.0" encoding="utf-8"?>
+<file path=ppt/slides/slide15.xml><?xml version="1.0" encoding="utf-8"?>
 <p:sld xmlns:a="http://schemas.openxmlformats.org/drawingml/2006/main" xmlns:r="http://schemas.openxmlformats.org/officeDocument/2006/relationships" xmlns:p="http://schemas.openxmlformats.org/presentationml/2006/main">
   <p:cSld>
     <p:spTree>
@@ -3933,6 +4477,12 @@
               <a:t>Not generalizable to all models</a:t>
             </a:r>
           </a:p>
+          <a:p>
+            <a:r>
+              <a:rPr lang="en-US" dirty="0"/>
+              <a:t>Lower accuracy</a:t>
+            </a:r>
+          </a:p>
         </p:txBody>
       </p:sp>
     </p:spTree>
@@ -3948,7 +4498,100 @@
 </p:sld>
 </file>
 
-<file path=ppt/slides/slide14.xml><?xml version="1.0" encoding="utf-8"?>
+<file path=ppt/slides/slide16.xml><?xml version="1.0" encoding="utf-8"?>
+<p:sld xmlns:a="http://schemas.openxmlformats.org/drawingml/2006/main" xmlns:r="http://schemas.openxmlformats.org/officeDocument/2006/relationships" xmlns:p="http://schemas.openxmlformats.org/presentationml/2006/main">
+  <p:cSld>
+    <p:spTree>
+      <p:nvGrpSpPr>
+        <p:cNvPr id="1" name=""/>
+        <p:cNvGrpSpPr/>
+        <p:nvPr/>
+      </p:nvGrpSpPr>
+      <p:grpSpPr>
+        <a:xfrm>
+          <a:off x="0" y="0"/>
+          <a:ext cx="0" cy="0"/>
+          <a:chOff x="0" y="0"/>
+          <a:chExt cx="0" cy="0"/>
+        </a:xfrm>
+      </p:grpSpPr>
+      <p:sp>
+        <p:nvSpPr>
+          <p:cNvPr id="2" name="Title 1">
+            <a:extLst>
+              <a:ext uri="{FF2B5EF4-FFF2-40B4-BE49-F238E27FC236}">
+                <a16:creationId xmlns:a16="http://schemas.microsoft.com/office/drawing/2014/main" id="{9B8C71B5-3D27-C046-9EFB-B7DE953D9894}"/>
+              </a:ext>
+            </a:extLst>
+          </p:cNvPr>
+          <p:cNvSpPr>
+            <a:spLocks noGrp="1"/>
+          </p:cNvSpPr>
+          <p:nvPr>
+            <p:ph type="title"/>
+          </p:nvPr>
+        </p:nvSpPr>
+        <p:spPr/>
+        <p:txBody>
+          <a:bodyPr/>
+          <a:lstStyle/>
+          <a:p>
+            <a:pPr algn="ctr"/>
+            <a:r>
+              <a:rPr lang="en-US" dirty="0"/>
+              <a:t>Future Directions</a:t>
+            </a:r>
+          </a:p>
+        </p:txBody>
+      </p:sp>
+      <p:sp>
+        <p:nvSpPr>
+          <p:cNvPr id="3" name="Content Placeholder 2">
+            <a:extLst>
+              <a:ext uri="{FF2B5EF4-FFF2-40B4-BE49-F238E27FC236}">
+                <a16:creationId xmlns:a16="http://schemas.microsoft.com/office/drawing/2014/main" id="{41124A75-3744-E544-B768-B0F78FE54ECC}"/>
+              </a:ext>
+            </a:extLst>
+          </p:cNvPr>
+          <p:cNvSpPr>
+            <a:spLocks noGrp="1"/>
+          </p:cNvSpPr>
+          <p:nvPr>
+            <p:ph idx="1"/>
+          </p:nvPr>
+        </p:nvSpPr>
+        <p:spPr/>
+        <p:txBody>
+          <a:bodyPr/>
+          <a:lstStyle/>
+          <a:p>
+            <a:r>
+              <a:rPr lang="en-US" dirty="0"/>
+              <a:t>Improve Accuracy</a:t>
+            </a:r>
+          </a:p>
+          <a:p>
+            <a:r>
+              <a:rPr lang="en-US" dirty="0"/>
+              <a:t>Apply to other models and tasks such as LSTM and language modeling</a:t>
+            </a:r>
+          </a:p>
+        </p:txBody>
+      </p:sp>
+    </p:spTree>
+    <p:extLst>
+      <p:ext uri="{BB962C8B-B14F-4D97-AF65-F5344CB8AC3E}">
+        <p14:creationId xmlns:p14="http://schemas.microsoft.com/office/powerpoint/2010/main" val="523695305"/>
+      </p:ext>
+    </p:extLst>
+  </p:cSld>
+  <p:clrMapOvr>
+    <a:masterClrMapping/>
+  </p:clrMapOvr>
+</p:sld>
+</file>
+
+<file path=ppt/slides/slide17.xml><?xml version="1.0" encoding="utf-8"?>
 <p:sld xmlns:a="http://schemas.openxmlformats.org/drawingml/2006/main" xmlns:r="http://schemas.openxmlformats.org/officeDocument/2006/relationships" xmlns:p="http://schemas.openxmlformats.org/presentationml/2006/main">
   <p:cSld>
     <p:spTree>
@@ -4041,337 +4684,6 @@
 </p:sld>
 </file>
 
-<file path=ppt/slides/slide15.xml><?xml version="1.0" encoding="utf-8"?>
-<p:sld xmlns:a="http://schemas.openxmlformats.org/drawingml/2006/main" xmlns:r="http://schemas.openxmlformats.org/officeDocument/2006/relationships" xmlns:p="http://schemas.openxmlformats.org/presentationml/2006/main">
-  <p:cSld>
-    <p:spTree>
-      <p:nvGrpSpPr>
-        <p:cNvPr id="1" name=""/>
-        <p:cNvGrpSpPr/>
-        <p:nvPr/>
-      </p:nvGrpSpPr>
-      <p:grpSpPr>
-        <a:xfrm>
-          <a:off x="0" y="0"/>
-          <a:ext cx="0" cy="0"/>
-          <a:chOff x="0" y="0"/>
-          <a:chExt cx="0" cy="0"/>
-        </a:xfrm>
-      </p:grpSpPr>
-      <p:sp>
-        <p:nvSpPr>
-          <p:cNvPr id="2" name="Title 1">
-            <a:extLst>
-              <a:ext uri="{FF2B5EF4-FFF2-40B4-BE49-F238E27FC236}">
-                <a16:creationId xmlns:a16="http://schemas.microsoft.com/office/drawing/2014/main" id="{999C6420-1F38-8142-B2CD-2BCC3BF72A49}"/>
-              </a:ext>
-            </a:extLst>
-          </p:cNvPr>
-          <p:cNvSpPr>
-            <a:spLocks noGrp="1"/>
-          </p:cNvSpPr>
-          <p:nvPr>
-            <p:ph type="title"/>
-          </p:nvPr>
-        </p:nvSpPr>
-        <p:spPr/>
-        <p:txBody>
-          <a:bodyPr/>
-          <a:lstStyle/>
-          <a:p>
-            <a:pPr algn="ctr"/>
-            <a:r>
-              <a:rPr lang="en-US" dirty="0"/>
-              <a:t>Idea</a:t>
-            </a:r>
-          </a:p>
-        </p:txBody>
-      </p:sp>
-      <p:sp>
-        <p:nvSpPr>
-          <p:cNvPr id="3" name="Content Placeholder 2">
-            <a:extLst>
-              <a:ext uri="{FF2B5EF4-FFF2-40B4-BE49-F238E27FC236}">
-                <a16:creationId xmlns:a16="http://schemas.microsoft.com/office/drawing/2014/main" id="{59251A9C-DEC4-0A47-85FC-B77B9DCB2B37}"/>
-              </a:ext>
-            </a:extLst>
-          </p:cNvPr>
-          <p:cNvSpPr>
-            <a:spLocks noGrp="1"/>
-          </p:cNvSpPr>
-          <p:nvPr>
-            <p:ph idx="1"/>
-          </p:nvPr>
-        </p:nvSpPr>
-        <p:spPr/>
-        <p:txBody>
-          <a:bodyPr/>
-          <a:lstStyle/>
-          <a:p>
-            <a:r>
-              <a:rPr lang="en-US" dirty="0"/>
-              <a:t>General framework for any model</a:t>
-            </a:r>
-          </a:p>
-          <a:p>
-            <a:r>
-              <a:rPr lang="en-US" dirty="0"/>
-              <a:t>Previous strategy (</a:t>
-            </a:r>
-            <a:r>
-              <a:rPr lang="en-US" dirty="0" err="1"/>
-              <a:t>Dietterich</a:t>
-            </a:r>
-            <a:r>
-              <a:rPr lang="en-US" dirty="0"/>
-              <a:t>, 2000) uses teacher ensembles trained on disjoint sets of training data for privacy</a:t>
-            </a:r>
-          </a:p>
-          <a:p>
-            <a:r>
-              <a:rPr lang="en-US" dirty="0"/>
-              <a:t>PATE strengthens this by restricting student training to limited number of teacher votes and only revealing topmost vote after adding random noise </a:t>
-            </a:r>
-          </a:p>
-          <a:p>
-            <a:r>
-              <a:rPr lang="en-US" dirty="0"/>
-              <a:t>Defend against white-box adversaries</a:t>
-            </a:r>
-          </a:p>
-        </p:txBody>
-      </p:sp>
-    </p:spTree>
-    <p:extLst>
-      <p:ext uri="{BB962C8B-B14F-4D97-AF65-F5344CB8AC3E}">
-        <p14:creationId xmlns:p14="http://schemas.microsoft.com/office/powerpoint/2010/main" val="2945142857"/>
-      </p:ext>
-    </p:extLst>
-  </p:cSld>
-  <p:clrMapOvr>
-    <a:masterClrMapping/>
-  </p:clrMapOvr>
-</p:sld>
-</file>
-
-<file path=ppt/slides/slide16.xml><?xml version="1.0" encoding="utf-8"?>
-<p:sld xmlns:a="http://schemas.openxmlformats.org/drawingml/2006/main" xmlns:r="http://schemas.openxmlformats.org/officeDocument/2006/relationships" xmlns:p="http://schemas.openxmlformats.org/presentationml/2006/main">
-  <p:cSld>
-    <p:spTree>
-      <p:nvGrpSpPr>
-        <p:cNvPr id="1" name=""/>
-        <p:cNvGrpSpPr/>
-        <p:nvPr/>
-      </p:nvGrpSpPr>
-      <p:grpSpPr>
-        <a:xfrm>
-          <a:off x="0" y="0"/>
-          <a:ext cx="0" cy="0"/>
-          <a:chOff x="0" y="0"/>
-          <a:chExt cx="0" cy="0"/>
-        </a:xfrm>
-      </p:grpSpPr>
-      <p:sp>
-        <p:nvSpPr>
-          <p:cNvPr id="2" name="Title 1">
-            <a:extLst>
-              <a:ext uri="{FF2B5EF4-FFF2-40B4-BE49-F238E27FC236}">
-                <a16:creationId xmlns:a16="http://schemas.microsoft.com/office/drawing/2014/main" id="{3729217E-D96B-41E5-87FB-E34337085BAF}"/>
-              </a:ext>
-            </a:extLst>
-          </p:cNvPr>
-          <p:cNvSpPr>
-            <a:spLocks noGrp="1"/>
-          </p:cNvSpPr>
-          <p:nvPr>
-            <p:ph type="title"/>
-          </p:nvPr>
-        </p:nvSpPr>
-        <p:spPr>
-          <a:xfrm>
-            <a:off x="838200" y="365125"/>
-            <a:ext cx="10515600" cy="1325563"/>
-          </a:xfrm>
-        </p:spPr>
-        <p:txBody>
-          <a:bodyPr/>
-          <a:lstStyle/>
-          <a:p>
-            <a:pPr algn="ctr"/>
-            <a:r>
-              <a:rPr lang="en-US" dirty="0"/>
-              <a:t>Framework for PATE</a:t>
-            </a:r>
-          </a:p>
-        </p:txBody>
-      </p:sp>
-      <p:pic>
-        <p:nvPicPr>
-          <p:cNvPr id="5" name="Picture 4">
-            <a:extLst>
-              <a:ext uri="{FF2B5EF4-FFF2-40B4-BE49-F238E27FC236}">
-                <a16:creationId xmlns:a16="http://schemas.microsoft.com/office/drawing/2014/main" id="{FD9A3B3B-F445-4043-97B6-D7CEFDD7C2BB}"/>
-              </a:ext>
-            </a:extLst>
-          </p:cNvPr>
-          <p:cNvPicPr>
-            <a:picLocks noChangeAspect="1"/>
-          </p:cNvPicPr>
-          <p:nvPr/>
-        </p:nvPicPr>
-        <p:blipFill>
-          <a:blip r:embed="rId2"/>
-          <a:stretch>
-            <a:fillRect/>
-          </a:stretch>
-        </p:blipFill>
-        <p:spPr>
-          <a:xfrm>
-            <a:off x="512956" y="1587336"/>
-            <a:ext cx="11166088" cy="3957745"/>
-          </a:xfrm>
-          <a:prstGeom prst="rect">
-            <a:avLst/>
-          </a:prstGeom>
-        </p:spPr>
-      </p:pic>
-    </p:spTree>
-    <p:extLst>
-      <p:ext uri="{BB962C8B-B14F-4D97-AF65-F5344CB8AC3E}">
-        <p14:creationId xmlns:p14="http://schemas.microsoft.com/office/powerpoint/2010/main" val="3525249349"/>
-      </p:ext>
-    </p:extLst>
-  </p:cSld>
-  <p:clrMapOvr>
-    <a:masterClrMapping/>
-  </p:clrMapOvr>
-</p:sld>
-</file>
-
-<file path=ppt/slides/slide17.xml><?xml version="1.0" encoding="utf-8"?>
-<p:sld xmlns:a="http://schemas.openxmlformats.org/drawingml/2006/main" xmlns:r="http://schemas.openxmlformats.org/officeDocument/2006/relationships" xmlns:p="http://schemas.openxmlformats.org/presentationml/2006/main">
-  <p:cSld>
-    <p:spTree>
-      <p:nvGrpSpPr>
-        <p:cNvPr id="1" name=""/>
-        <p:cNvGrpSpPr/>
-        <p:nvPr/>
-      </p:nvGrpSpPr>
-      <p:grpSpPr>
-        <a:xfrm>
-          <a:off x="0" y="0"/>
-          <a:ext cx="0" cy="0"/>
-          <a:chOff x="0" y="0"/>
-          <a:chExt cx="0" cy="0"/>
-        </a:xfrm>
-      </p:grpSpPr>
-      <p:sp>
-        <p:nvSpPr>
-          <p:cNvPr id="2" name="Title 1">
-            <a:extLst>
-              <a:ext uri="{FF2B5EF4-FFF2-40B4-BE49-F238E27FC236}">
-                <a16:creationId xmlns:a16="http://schemas.microsoft.com/office/drawing/2014/main" id="{30EDEFCC-D211-604B-8A5B-35D6CAFC20EA}"/>
-              </a:ext>
-            </a:extLst>
-          </p:cNvPr>
-          <p:cNvSpPr>
-            <a:spLocks noGrp="1"/>
-          </p:cNvSpPr>
-          <p:nvPr>
-            <p:ph type="title"/>
-          </p:nvPr>
-        </p:nvSpPr>
-        <p:spPr/>
-        <p:txBody>
-          <a:bodyPr/>
-          <a:lstStyle/>
-          <a:p>
-            <a:pPr algn="ctr"/>
-            <a:r>
-              <a:rPr lang="en-US" dirty="0"/>
-              <a:t>Details</a:t>
-            </a:r>
-          </a:p>
-        </p:txBody>
-      </p:sp>
-      <p:pic>
-        <p:nvPicPr>
-          <p:cNvPr id="4" name="Picture 3">
-            <a:extLst>
-              <a:ext uri="{FF2B5EF4-FFF2-40B4-BE49-F238E27FC236}">
-                <a16:creationId xmlns:a16="http://schemas.microsoft.com/office/drawing/2014/main" id="{5271074C-95EA-6F43-9CF0-C673D8F969E0}"/>
-              </a:ext>
-            </a:extLst>
-          </p:cNvPr>
-          <p:cNvPicPr>
-            <a:picLocks noChangeAspect="1"/>
-          </p:cNvPicPr>
-          <p:nvPr/>
-        </p:nvPicPr>
-        <p:blipFill>
-          <a:blip r:embed="rId2"/>
-          <a:stretch>
-            <a:fillRect/>
-          </a:stretch>
-        </p:blipFill>
-        <p:spPr>
-          <a:xfrm>
-            <a:off x="512956" y="1587336"/>
-            <a:ext cx="6739919" cy="2388919"/>
-          </a:xfrm>
-          <a:prstGeom prst="rect">
-            <a:avLst/>
-          </a:prstGeom>
-        </p:spPr>
-      </p:pic>
-      <p:sp>
-        <p:nvSpPr>
-          <p:cNvPr id="5" name="TextBox 4">
-            <a:extLst>
-              <a:ext uri="{FF2B5EF4-FFF2-40B4-BE49-F238E27FC236}">
-                <a16:creationId xmlns:a16="http://schemas.microsoft.com/office/drawing/2014/main" id="{C6BF3693-3F91-5540-9779-86C5012D1513}"/>
-              </a:ext>
-            </a:extLst>
-          </p:cNvPr>
-          <p:cNvSpPr txBox="1"/>
-          <p:nvPr/>
-        </p:nvSpPr>
-        <p:spPr>
-          <a:xfrm>
-            <a:off x="838199" y="4532000"/>
-            <a:ext cx="10148455" cy="830997"/>
-          </a:xfrm>
-          <a:prstGeom prst="rect">
-            <a:avLst/>
-          </a:prstGeom>
-          <a:noFill/>
-        </p:spPr>
-        <p:txBody>
-          <a:bodyPr wrap="square" rtlCol="0">
-            <a:spAutoFit/>
-          </a:bodyPr>
-          <a:lstStyle/>
-          <a:p>
-            <a:r>
-              <a:rPr lang="en-US" sz="2400" dirty="0"/>
-              <a:t>Student is trained using fixed number of queries to the teacher. After that when an adversary queries the student model the total privacy loss is not increased</a:t>
-            </a:r>
-          </a:p>
-        </p:txBody>
-      </p:sp>
-    </p:spTree>
-    <p:extLst>
-      <p:ext uri="{BB962C8B-B14F-4D97-AF65-F5344CB8AC3E}">
-        <p14:creationId xmlns:p14="http://schemas.microsoft.com/office/powerpoint/2010/main" val="2379380722"/>
-      </p:ext>
-    </p:extLst>
-  </p:cSld>
-  <p:clrMapOvr>
-    <a:masterClrMapping/>
-  </p:clrMapOvr>
-</p:sld>
-</file>
-
 <file path=ppt/slides/slide18.xml><?xml version="1.0" encoding="utf-8"?>
 <p:sld xmlns:a="http://schemas.openxmlformats.org/drawingml/2006/main" xmlns:r="http://schemas.openxmlformats.org/officeDocument/2006/relationships" xmlns:p="http://schemas.openxmlformats.org/presentationml/2006/main">
   <p:cSld>
@@ -4394,7 +4706,7 @@
           <p:cNvPr id="2" name="Title 1">
             <a:extLst>
               <a:ext uri="{FF2B5EF4-FFF2-40B4-BE49-F238E27FC236}">
-                <a16:creationId xmlns:a16="http://schemas.microsoft.com/office/drawing/2014/main" id="{6C3BB0E1-B0AD-9549-9D53-C1E37C32C736}"/>
+                <a16:creationId xmlns:a16="http://schemas.microsoft.com/office/drawing/2014/main" id="{999C6420-1F38-8142-B2CD-2BCC3BF72A49}"/>
               </a:ext>
             </a:extLst>
           </p:cNvPr>
@@ -4413,7 +4725,7 @@
             <a:pPr algn="ctr"/>
             <a:r>
               <a:rPr lang="en-US" dirty="0"/>
-              <a:t>Drawbacks of Naïve Aggregation</a:t>
+              <a:t>Idea</a:t>
             </a:r>
           </a:p>
         </p:txBody>
@@ -4423,7 +4735,7 @@
           <p:cNvPr id="3" name="Content Placeholder 2">
             <a:extLst>
               <a:ext uri="{FF2B5EF4-FFF2-40B4-BE49-F238E27FC236}">
-                <a16:creationId xmlns:a16="http://schemas.microsoft.com/office/drawing/2014/main" id="{DA71D661-F93C-D44E-8D55-895C8EB8EA0D}"/>
+                <a16:creationId xmlns:a16="http://schemas.microsoft.com/office/drawing/2014/main" id="{59251A9C-DEC4-0A47-85FC-B77B9DCB2B37}"/>
               </a:ext>
             </a:extLst>
           </p:cNvPr>
@@ -4436,124 +4748,46 @@
         </p:nvSpPr>
         <p:spPr/>
         <p:txBody>
-          <a:bodyPr>
-            <a:normAutofit lnSpcReduction="10000"/>
-          </a:bodyPr>
-          <a:lstStyle/>
-          <a:p>
-            <a:endParaRPr lang="en-US" dirty="0"/>
-          </a:p>
-          <a:p>
-            <a:endParaRPr lang="en-US" dirty="0"/>
-          </a:p>
+          <a:bodyPr/>
+          <a:lstStyle/>
           <a:p>
             <a:r>
               <a:rPr lang="en-US" dirty="0"/>
-              <a:t>Single training example could have large effect if teachers disagree</a:t>
-            </a:r>
-          </a:p>
-          <a:p>
-            <a:endParaRPr lang="en-US" dirty="0"/>
+              <a:t>General framework for any model</a:t>
+            </a:r>
           </a:p>
           <a:p>
             <a:r>
               <a:rPr lang="en-US" dirty="0"/>
-              <a:t>Solution: Introduce noise</a:t>
-            </a:r>
-          </a:p>
-          <a:p>
-            <a:endParaRPr lang="en-US" dirty="0"/>
-          </a:p>
-          <a:p>
-            <a:pPr marL="0" indent="0">
-              <a:buNone/>
-            </a:pPr>
-            <a:endParaRPr lang="en-US" dirty="0"/>
-          </a:p>
-          <a:p>
-            <a:pPr marL="0" indent="0">
-              <a:buNone/>
-            </a:pPr>
-            <a:endParaRPr lang="en-US" dirty="0"/>
-          </a:p>
-          <a:p>
+              <a:t>Previous strategy (</a:t>
+            </a:r>
+            <a:r>
+              <a:rPr lang="en-US" dirty="0" err="1"/>
+              <a:t>Dietterich</a:t>
+            </a:r>
             <a:r>
               <a:rPr lang="en-US" dirty="0"/>
-              <a:t>Key Idea: Classification can no longer depend on a single teacher</a:t>
-            </a:r>
-          </a:p>
-          <a:p>
-            <a:pPr marL="0" indent="0">
-              <a:buNone/>
-            </a:pPr>
-            <a:endParaRPr lang="en-US" dirty="0"/>
-          </a:p>
-        </p:txBody>
-      </p:sp>
-      <p:pic>
-        <p:nvPicPr>
-          <p:cNvPr id="6" name="Picture 5">
-            <a:extLst>
-              <a:ext uri="{FF2B5EF4-FFF2-40B4-BE49-F238E27FC236}">
-                <a16:creationId xmlns:a16="http://schemas.microsoft.com/office/drawing/2014/main" id="{54F13357-E884-8C47-A8AB-9739DE45B041}"/>
-              </a:ext>
-            </a:extLst>
-          </p:cNvPr>
-          <p:cNvPicPr>
-            <a:picLocks noChangeAspect="1"/>
-          </p:cNvPicPr>
-          <p:nvPr/>
-        </p:nvPicPr>
-        <p:blipFill>
-          <a:blip r:embed="rId2"/>
-          <a:stretch>
-            <a:fillRect/>
-          </a:stretch>
-        </p:blipFill>
-        <p:spPr>
-          <a:xfrm>
-            <a:off x="2611655" y="4063286"/>
-            <a:ext cx="6968690" cy="1429312"/>
-          </a:xfrm>
-          <a:prstGeom prst="rect">
-            <a:avLst/>
-          </a:prstGeom>
-        </p:spPr>
-      </p:pic>
-      <p:pic>
-        <p:nvPicPr>
-          <p:cNvPr id="8" name="Picture 7">
-            <a:extLst>
-              <a:ext uri="{FF2B5EF4-FFF2-40B4-BE49-F238E27FC236}">
-                <a16:creationId xmlns:a16="http://schemas.microsoft.com/office/drawing/2014/main" id="{D4D9B45D-9DD1-3042-8E7C-98EC30FC7B76}"/>
-              </a:ext>
-            </a:extLst>
-          </p:cNvPr>
-          <p:cNvPicPr>
-            <a:picLocks noChangeAspect="1"/>
-          </p:cNvPicPr>
-          <p:nvPr/>
-        </p:nvPicPr>
-        <p:blipFill>
-          <a:blip r:embed="rId3"/>
-          <a:stretch>
-            <a:fillRect/>
-          </a:stretch>
-        </p:blipFill>
-        <p:spPr>
-          <a:xfrm>
-            <a:off x="2079356" y="1825625"/>
-            <a:ext cx="8033288" cy="651824"/>
-          </a:xfrm>
-          <a:prstGeom prst="rect">
-            <a:avLst/>
-          </a:prstGeom>
-        </p:spPr>
-      </p:pic>
+              <a:t>, 2000) uses teacher ensembles trained on disjoint sets of training data for privacy</a:t>
+            </a:r>
+          </a:p>
+          <a:p>
+            <a:r>
+              <a:rPr lang="en-US" dirty="0"/>
+              <a:t>PATE strengthens this by restricting student training to limited number of teacher votes and only revealing topmost vote after adding random noise </a:t>
+            </a:r>
+          </a:p>
+          <a:p>
+            <a:r>
+              <a:rPr lang="en-US" dirty="0"/>
+              <a:t>Defend against black-box and white-box adversaries</a:t>
+            </a:r>
+          </a:p>
+        </p:txBody>
+      </p:sp>
     </p:spTree>
     <p:extLst>
       <p:ext uri="{BB962C8B-B14F-4D97-AF65-F5344CB8AC3E}">
-        <p14:creationId xmlns:p14="http://schemas.microsoft.com/office/powerpoint/2010/main" val="3514625868"/>
+        <p14:creationId xmlns:p14="http://schemas.microsoft.com/office/powerpoint/2010/main" val="2945142857"/>
       </p:ext>
     </p:extLst>
   </p:cSld>
@@ -4585,7 +4819,7 @@
           <p:cNvPr id="2" name="Title 1">
             <a:extLst>
               <a:ext uri="{FF2B5EF4-FFF2-40B4-BE49-F238E27FC236}">
-                <a16:creationId xmlns:a16="http://schemas.microsoft.com/office/drawing/2014/main" id="{E1DE4987-9CC9-5C4B-A83C-625F402D3B6D}"/>
+                <a16:creationId xmlns:a16="http://schemas.microsoft.com/office/drawing/2014/main" id="{3729217E-D96B-41E5-87FB-E34337085BAF}"/>
               </a:ext>
             </a:extLst>
           </p:cNvPr>
@@ -4596,7 +4830,12 @@
             <p:ph type="title"/>
           </p:nvPr>
         </p:nvSpPr>
-        <p:spPr/>
+        <p:spPr>
+          <a:xfrm>
+            <a:off x="838200" y="365125"/>
+            <a:ext cx="10515600" cy="1325563"/>
+          </a:xfrm>
+        </p:spPr>
         <p:txBody>
           <a:bodyPr/>
           <a:lstStyle/>
@@ -4604,17 +4843,17 @@
             <a:pPr algn="ctr"/>
             <a:r>
               <a:rPr lang="en-US" dirty="0"/>
-              <a:t>PATE Results</a:t>
+              <a:t>Framework for PATE</a:t>
             </a:r>
           </a:p>
         </p:txBody>
       </p:sp>
       <p:pic>
         <p:nvPicPr>
-          <p:cNvPr id="4" name="Picture 3">
-            <a:extLst>
-              <a:ext uri="{FF2B5EF4-FFF2-40B4-BE49-F238E27FC236}">
-                <a16:creationId xmlns:a16="http://schemas.microsoft.com/office/drawing/2014/main" id="{BC8F9E2F-7210-A84E-9764-FB20F47B366E}"/>
+          <p:cNvPr id="5" name="Picture 4">
+            <a:extLst>
+              <a:ext uri="{FF2B5EF4-FFF2-40B4-BE49-F238E27FC236}">
+                <a16:creationId xmlns:a16="http://schemas.microsoft.com/office/drawing/2014/main" id="{FD9A3B3B-F445-4043-97B6-D7CEFDD7C2BB}"/>
               </a:ext>
             </a:extLst>
           </p:cNvPr>
@@ -4631,38 +4870,8 @@
         </p:blipFill>
         <p:spPr>
           <a:xfrm>
-            <a:off x="711200" y="1547668"/>
-            <a:ext cx="5384800" cy="4178300"/>
-          </a:xfrm>
-          <a:prstGeom prst="rect">
-            <a:avLst/>
-          </a:prstGeom>
-        </p:spPr>
-      </p:pic>
-      <p:pic>
-        <p:nvPicPr>
-          <p:cNvPr id="5" name="Picture 4">
-            <a:extLst>
-              <a:ext uri="{FF2B5EF4-FFF2-40B4-BE49-F238E27FC236}">
-                <a16:creationId xmlns:a16="http://schemas.microsoft.com/office/drawing/2014/main" id="{EEA21A40-F712-0E45-AB7D-408FF59A7CE1}"/>
-              </a:ext>
-            </a:extLst>
-          </p:cNvPr>
-          <p:cNvPicPr>
-            <a:picLocks noChangeAspect="1"/>
-          </p:cNvPicPr>
-          <p:nvPr/>
-        </p:nvPicPr>
-        <p:blipFill>
-          <a:blip r:embed="rId3"/>
-          <a:stretch>
-            <a:fillRect/>
-          </a:stretch>
-        </p:blipFill>
-        <p:spPr>
-          <a:xfrm>
-            <a:off x="6096000" y="1547668"/>
-            <a:ext cx="5480050" cy="4186319"/>
+            <a:off x="512956" y="1587336"/>
+            <a:ext cx="11166088" cy="3957745"/>
           </a:xfrm>
           <a:prstGeom prst="rect">
             <a:avLst/>
@@ -4672,7 +4881,7 @@
     </p:spTree>
     <p:extLst>
       <p:ext uri="{BB962C8B-B14F-4D97-AF65-F5344CB8AC3E}">
-        <p14:creationId xmlns:p14="http://schemas.microsoft.com/office/powerpoint/2010/main" val="266828348"/>
+        <p14:creationId xmlns:p14="http://schemas.microsoft.com/office/powerpoint/2010/main" val="3525249349"/>
       </p:ext>
     </p:extLst>
   </p:cSld>
@@ -4900,6 +5109,475 @@
           <p:cNvPr id="2" name="Title 1">
             <a:extLst>
               <a:ext uri="{FF2B5EF4-FFF2-40B4-BE49-F238E27FC236}">
+                <a16:creationId xmlns:a16="http://schemas.microsoft.com/office/drawing/2014/main" id="{6C3BB0E1-B0AD-9549-9D53-C1E37C32C736}"/>
+              </a:ext>
+            </a:extLst>
+          </p:cNvPr>
+          <p:cNvSpPr>
+            <a:spLocks noGrp="1"/>
+          </p:cNvSpPr>
+          <p:nvPr>
+            <p:ph type="title"/>
+          </p:nvPr>
+        </p:nvSpPr>
+        <p:spPr/>
+        <p:txBody>
+          <a:bodyPr/>
+          <a:lstStyle/>
+          <a:p>
+            <a:pPr algn="ctr"/>
+            <a:r>
+              <a:rPr lang="en-US" dirty="0"/>
+              <a:t>Drawbacks of Naïve Aggregation</a:t>
+            </a:r>
+          </a:p>
+        </p:txBody>
+      </p:sp>
+      <p:sp>
+        <p:nvSpPr>
+          <p:cNvPr id="3" name="Content Placeholder 2">
+            <a:extLst>
+              <a:ext uri="{FF2B5EF4-FFF2-40B4-BE49-F238E27FC236}">
+                <a16:creationId xmlns:a16="http://schemas.microsoft.com/office/drawing/2014/main" id="{DA71D661-F93C-D44E-8D55-895C8EB8EA0D}"/>
+              </a:ext>
+            </a:extLst>
+          </p:cNvPr>
+          <p:cNvSpPr>
+            <a:spLocks noGrp="1"/>
+          </p:cNvSpPr>
+          <p:nvPr>
+            <p:ph idx="1"/>
+          </p:nvPr>
+        </p:nvSpPr>
+        <p:spPr/>
+        <p:txBody>
+          <a:bodyPr>
+            <a:normAutofit fontScale="92500" lnSpcReduction="10000"/>
+          </a:bodyPr>
+          <a:lstStyle/>
+          <a:p>
+            <a:endParaRPr lang="en-US" dirty="0"/>
+          </a:p>
+          <a:p>
+            <a:endParaRPr lang="en-US" dirty="0"/>
+          </a:p>
+          <a:p>
+            <a:r>
+              <a:rPr lang="en-US" dirty="0"/>
+              <a:t>Single training example could have large effect if teachers disagree</a:t>
+            </a:r>
+          </a:p>
+          <a:p>
+            <a:endParaRPr lang="en-US" dirty="0"/>
+          </a:p>
+          <a:p>
+            <a:r>
+              <a:rPr lang="en-US" dirty="0"/>
+              <a:t>Solution: Introduce noise</a:t>
+            </a:r>
+          </a:p>
+          <a:p>
+            <a:endParaRPr lang="en-US" dirty="0"/>
+          </a:p>
+          <a:p>
+            <a:pPr marL="0" indent="0">
+              <a:buNone/>
+            </a:pPr>
+            <a:endParaRPr lang="en-US" dirty="0"/>
+          </a:p>
+          <a:p>
+            <a:pPr marL="0" indent="0">
+              <a:buNone/>
+            </a:pPr>
+            <a:endParaRPr lang="en-US" dirty="0"/>
+          </a:p>
+          <a:p>
+            <a:r>
+              <a:rPr lang="en-US" dirty="0"/>
+              <a:t>Key Idea: Classification can no longer depend on a single teacher/training example</a:t>
+            </a:r>
+          </a:p>
+          <a:p>
+            <a:pPr marL="0" indent="0">
+              <a:buNone/>
+            </a:pPr>
+            <a:endParaRPr lang="en-US" dirty="0"/>
+          </a:p>
+        </p:txBody>
+      </p:sp>
+      <p:pic>
+        <p:nvPicPr>
+          <p:cNvPr id="6" name="Picture 5">
+            <a:extLst>
+              <a:ext uri="{FF2B5EF4-FFF2-40B4-BE49-F238E27FC236}">
+                <a16:creationId xmlns:a16="http://schemas.microsoft.com/office/drawing/2014/main" id="{54F13357-E884-8C47-A8AB-9739DE45B041}"/>
+              </a:ext>
+            </a:extLst>
+          </p:cNvPr>
+          <p:cNvPicPr>
+            <a:picLocks noChangeAspect="1"/>
+          </p:cNvPicPr>
+          <p:nvPr/>
+        </p:nvPicPr>
+        <p:blipFill>
+          <a:blip r:embed="rId2"/>
+          <a:stretch>
+            <a:fillRect/>
+          </a:stretch>
+        </p:blipFill>
+        <p:spPr>
+          <a:xfrm>
+            <a:off x="2611655" y="3998738"/>
+            <a:ext cx="6968690" cy="1429312"/>
+          </a:xfrm>
+          <a:prstGeom prst="rect">
+            <a:avLst/>
+          </a:prstGeom>
+        </p:spPr>
+      </p:pic>
+      <p:pic>
+        <p:nvPicPr>
+          <p:cNvPr id="8" name="Picture 7">
+            <a:extLst>
+              <a:ext uri="{FF2B5EF4-FFF2-40B4-BE49-F238E27FC236}">
+                <a16:creationId xmlns:a16="http://schemas.microsoft.com/office/drawing/2014/main" id="{D4D9B45D-9DD1-3042-8E7C-98EC30FC7B76}"/>
+              </a:ext>
+            </a:extLst>
+          </p:cNvPr>
+          <p:cNvPicPr>
+            <a:picLocks noChangeAspect="1"/>
+          </p:cNvPicPr>
+          <p:nvPr/>
+        </p:nvPicPr>
+        <p:blipFill>
+          <a:blip r:embed="rId3"/>
+          <a:stretch>
+            <a:fillRect/>
+          </a:stretch>
+        </p:blipFill>
+        <p:spPr>
+          <a:xfrm>
+            <a:off x="2079356" y="1825625"/>
+            <a:ext cx="8033288" cy="651824"/>
+          </a:xfrm>
+          <a:prstGeom prst="rect">
+            <a:avLst/>
+          </a:prstGeom>
+        </p:spPr>
+      </p:pic>
+    </p:spTree>
+    <p:extLst>
+      <p:ext uri="{BB962C8B-B14F-4D97-AF65-F5344CB8AC3E}">
+        <p14:creationId xmlns:p14="http://schemas.microsoft.com/office/powerpoint/2010/main" val="3514625868"/>
+      </p:ext>
+    </p:extLst>
+  </p:cSld>
+  <p:clrMapOvr>
+    <a:masterClrMapping/>
+  </p:clrMapOvr>
+</p:sld>
+</file>
+
+<file path=ppt/slides/slide21.xml><?xml version="1.0" encoding="utf-8"?>
+<p:sld xmlns:a="http://schemas.openxmlformats.org/drawingml/2006/main" xmlns:r="http://schemas.openxmlformats.org/officeDocument/2006/relationships" xmlns:p="http://schemas.openxmlformats.org/presentationml/2006/main">
+  <p:cSld>
+    <p:spTree>
+      <p:nvGrpSpPr>
+        <p:cNvPr id="1" name=""/>
+        <p:cNvGrpSpPr/>
+        <p:nvPr/>
+      </p:nvGrpSpPr>
+      <p:grpSpPr>
+        <a:xfrm>
+          <a:off x="0" y="0"/>
+          <a:ext cx="0" cy="0"/>
+          <a:chOff x="0" y="0"/>
+          <a:chExt cx="0" cy="0"/>
+        </a:xfrm>
+      </p:grpSpPr>
+      <p:sp>
+        <p:nvSpPr>
+          <p:cNvPr id="2" name="Title 1">
+            <a:extLst>
+              <a:ext uri="{FF2B5EF4-FFF2-40B4-BE49-F238E27FC236}">
+                <a16:creationId xmlns:a16="http://schemas.microsoft.com/office/drawing/2014/main" id="{30EDEFCC-D211-604B-8A5B-35D6CAFC20EA}"/>
+              </a:ext>
+            </a:extLst>
+          </p:cNvPr>
+          <p:cNvSpPr>
+            <a:spLocks noGrp="1"/>
+          </p:cNvSpPr>
+          <p:nvPr>
+            <p:ph type="title"/>
+          </p:nvPr>
+        </p:nvSpPr>
+        <p:spPr/>
+        <p:txBody>
+          <a:bodyPr/>
+          <a:lstStyle/>
+          <a:p>
+            <a:pPr algn="ctr"/>
+            <a:r>
+              <a:rPr lang="en-US" dirty="0"/>
+              <a:t>Details</a:t>
+            </a:r>
+          </a:p>
+        </p:txBody>
+      </p:sp>
+      <p:pic>
+        <p:nvPicPr>
+          <p:cNvPr id="4" name="Picture 3">
+            <a:extLst>
+              <a:ext uri="{FF2B5EF4-FFF2-40B4-BE49-F238E27FC236}">
+                <a16:creationId xmlns:a16="http://schemas.microsoft.com/office/drawing/2014/main" id="{5271074C-95EA-6F43-9CF0-C673D8F969E0}"/>
+              </a:ext>
+            </a:extLst>
+          </p:cNvPr>
+          <p:cNvPicPr>
+            <a:picLocks noChangeAspect="1"/>
+          </p:cNvPicPr>
+          <p:nvPr/>
+        </p:nvPicPr>
+        <p:blipFill>
+          <a:blip r:embed="rId2"/>
+          <a:stretch>
+            <a:fillRect/>
+          </a:stretch>
+        </p:blipFill>
+        <p:spPr>
+          <a:xfrm>
+            <a:off x="512956" y="1587336"/>
+            <a:ext cx="6739919" cy="2388919"/>
+          </a:xfrm>
+          <a:prstGeom prst="rect">
+            <a:avLst/>
+          </a:prstGeom>
+        </p:spPr>
+      </p:pic>
+      <p:sp>
+        <p:nvSpPr>
+          <p:cNvPr id="5" name="TextBox 4">
+            <a:extLst>
+              <a:ext uri="{FF2B5EF4-FFF2-40B4-BE49-F238E27FC236}">
+                <a16:creationId xmlns:a16="http://schemas.microsoft.com/office/drawing/2014/main" id="{C6BF3693-3F91-5540-9779-86C5012D1513}"/>
+              </a:ext>
+            </a:extLst>
+          </p:cNvPr>
+          <p:cNvSpPr txBox="1"/>
+          <p:nvPr/>
+        </p:nvSpPr>
+        <p:spPr>
+          <a:xfrm>
+            <a:off x="838199" y="4532000"/>
+            <a:ext cx="10148455" cy="830997"/>
+          </a:xfrm>
+          <a:prstGeom prst="rect">
+            <a:avLst/>
+          </a:prstGeom>
+          <a:noFill/>
+        </p:spPr>
+        <p:txBody>
+          <a:bodyPr wrap="square" rtlCol="0">
+            <a:spAutoFit/>
+          </a:bodyPr>
+          <a:lstStyle/>
+          <a:p>
+            <a:r>
+              <a:rPr lang="en-US" sz="2400" dirty="0"/>
+              <a:t>Student is trained using fixed number of queries to the teacher. After that when an adversary queries the student model the total privacy loss is not increased</a:t>
+            </a:r>
+          </a:p>
+        </p:txBody>
+      </p:sp>
+    </p:spTree>
+    <p:extLst>
+      <p:ext uri="{BB962C8B-B14F-4D97-AF65-F5344CB8AC3E}">
+        <p14:creationId xmlns:p14="http://schemas.microsoft.com/office/powerpoint/2010/main" val="2379380722"/>
+      </p:ext>
+    </p:extLst>
+  </p:cSld>
+  <p:clrMapOvr>
+    <a:masterClrMapping/>
+  </p:clrMapOvr>
+</p:sld>
+</file>
+
+<file path=ppt/slides/slide22.xml><?xml version="1.0" encoding="utf-8"?>
+<p:sld xmlns:a="http://schemas.openxmlformats.org/drawingml/2006/main" xmlns:r="http://schemas.openxmlformats.org/officeDocument/2006/relationships" xmlns:p="http://schemas.openxmlformats.org/presentationml/2006/main">
+  <p:cSld>
+    <p:spTree>
+      <p:nvGrpSpPr>
+        <p:cNvPr id="1" name=""/>
+        <p:cNvGrpSpPr/>
+        <p:nvPr/>
+      </p:nvGrpSpPr>
+      <p:grpSpPr>
+        <a:xfrm>
+          <a:off x="0" y="0"/>
+          <a:ext cx="0" cy="0"/>
+          <a:chOff x="0" y="0"/>
+          <a:chExt cx="0" cy="0"/>
+        </a:xfrm>
+      </p:grpSpPr>
+      <p:sp>
+        <p:nvSpPr>
+          <p:cNvPr id="2" name="Title 1">
+            <a:extLst>
+              <a:ext uri="{FF2B5EF4-FFF2-40B4-BE49-F238E27FC236}">
+                <a16:creationId xmlns:a16="http://schemas.microsoft.com/office/drawing/2014/main" id="{E1DE4987-9CC9-5C4B-A83C-625F402D3B6D}"/>
+              </a:ext>
+            </a:extLst>
+          </p:cNvPr>
+          <p:cNvSpPr>
+            <a:spLocks noGrp="1"/>
+          </p:cNvSpPr>
+          <p:nvPr>
+            <p:ph type="title"/>
+          </p:nvPr>
+        </p:nvSpPr>
+        <p:spPr/>
+        <p:txBody>
+          <a:bodyPr/>
+          <a:lstStyle/>
+          <a:p>
+            <a:pPr algn="ctr"/>
+            <a:r>
+              <a:rPr lang="en-US" dirty="0"/>
+              <a:t>PATE Results</a:t>
+            </a:r>
+          </a:p>
+        </p:txBody>
+      </p:sp>
+      <p:pic>
+        <p:nvPicPr>
+          <p:cNvPr id="4" name="Picture 3">
+            <a:extLst>
+              <a:ext uri="{FF2B5EF4-FFF2-40B4-BE49-F238E27FC236}">
+                <a16:creationId xmlns:a16="http://schemas.microsoft.com/office/drawing/2014/main" id="{BC8F9E2F-7210-A84E-9764-FB20F47B366E}"/>
+              </a:ext>
+            </a:extLst>
+          </p:cNvPr>
+          <p:cNvPicPr>
+            <a:picLocks noChangeAspect="1"/>
+          </p:cNvPicPr>
+          <p:nvPr/>
+        </p:nvPicPr>
+        <p:blipFill>
+          <a:blip r:embed="rId2"/>
+          <a:stretch>
+            <a:fillRect/>
+          </a:stretch>
+        </p:blipFill>
+        <p:spPr>
+          <a:xfrm>
+            <a:off x="711200" y="1547668"/>
+            <a:ext cx="5384800" cy="4178300"/>
+          </a:xfrm>
+          <a:prstGeom prst="rect">
+            <a:avLst/>
+          </a:prstGeom>
+        </p:spPr>
+      </p:pic>
+      <p:pic>
+        <p:nvPicPr>
+          <p:cNvPr id="5" name="Picture 4">
+            <a:extLst>
+              <a:ext uri="{FF2B5EF4-FFF2-40B4-BE49-F238E27FC236}">
+                <a16:creationId xmlns:a16="http://schemas.microsoft.com/office/drawing/2014/main" id="{EEA21A40-F712-0E45-AB7D-408FF59A7CE1}"/>
+              </a:ext>
+            </a:extLst>
+          </p:cNvPr>
+          <p:cNvPicPr>
+            <a:picLocks noChangeAspect="1"/>
+          </p:cNvPicPr>
+          <p:nvPr/>
+        </p:nvPicPr>
+        <p:blipFill>
+          <a:blip r:embed="rId3"/>
+          <a:stretch>
+            <a:fillRect/>
+          </a:stretch>
+        </p:blipFill>
+        <p:spPr>
+          <a:xfrm>
+            <a:off x="6096000" y="1547668"/>
+            <a:ext cx="5480050" cy="4186319"/>
+          </a:xfrm>
+          <a:prstGeom prst="rect">
+            <a:avLst/>
+          </a:prstGeom>
+        </p:spPr>
+      </p:pic>
+      <p:sp>
+        <p:nvSpPr>
+          <p:cNvPr id="3" name="TextBox 2">
+            <a:extLst>
+              <a:ext uri="{FF2B5EF4-FFF2-40B4-BE49-F238E27FC236}">
+                <a16:creationId xmlns:a16="http://schemas.microsoft.com/office/drawing/2014/main" id="{90A76A0A-D24C-5A4B-9D42-2D1581865CE9}"/>
+              </a:ext>
+            </a:extLst>
+          </p:cNvPr>
+          <p:cNvSpPr txBox="1"/>
+          <p:nvPr/>
+        </p:nvSpPr>
+        <p:spPr>
+          <a:xfrm>
+            <a:off x="6519553" y="6044540"/>
+            <a:ext cx="4952011" cy="646331"/>
+          </a:xfrm>
+          <a:prstGeom prst="rect">
+            <a:avLst/>
+          </a:prstGeom>
+          <a:noFill/>
+        </p:spPr>
+        <p:txBody>
+          <a:bodyPr wrap="square" rtlCol="0">
+            <a:spAutoFit/>
+          </a:bodyPr>
+          <a:lstStyle/>
+          <a:p>
+            <a:r>
+              <a:rPr lang="en-US" dirty="0"/>
+              <a:t>Gap increases as number of teachers increases -&gt; Less Privacy Loss, but there will be acc. tradeoffs</a:t>
+            </a:r>
+          </a:p>
+        </p:txBody>
+      </p:sp>
+    </p:spTree>
+    <p:extLst>
+      <p:ext uri="{BB962C8B-B14F-4D97-AF65-F5344CB8AC3E}">
+        <p14:creationId xmlns:p14="http://schemas.microsoft.com/office/powerpoint/2010/main" val="266828348"/>
+      </p:ext>
+    </p:extLst>
+  </p:cSld>
+  <p:clrMapOvr>
+    <a:masterClrMapping/>
+  </p:clrMapOvr>
+</p:sld>
+</file>
+
+<file path=ppt/slides/slide23.xml><?xml version="1.0" encoding="utf-8"?>
+<p:sld xmlns:a="http://schemas.openxmlformats.org/drawingml/2006/main" xmlns:r="http://schemas.openxmlformats.org/officeDocument/2006/relationships" xmlns:p="http://schemas.openxmlformats.org/presentationml/2006/main">
+  <p:cSld>
+    <p:spTree>
+      <p:nvGrpSpPr>
+        <p:cNvPr id="1" name=""/>
+        <p:cNvGrpSpPr/>
+        <p:nvPr/>
+      </p:nvGrpSpPr>
+      <p:grpSpPr>
+        <a:xfrm>
+          <a:off x="0" y="0"/>
+          <a:ext cx="0" cy="0"/>
+          <a:chOff x="0" y="0"/>
+          <a:chExt cx="0" cy="0"/>
+        </a:xfrm>
+      </p:grpSpPr>
+      <p:sp>
+        <p:nvSpPr>
+          <p:cNvPr id="2" name="Title 1">
+            <a:extLst>
+              <a:ext uri="{FF2B5EF4-FFF2-40B4-BE49-F238E27FC236}">
                 <a16:creationId xmlns:a16="http://schemas.microsoft.com/office/drawing/2014/main" id="{A86304F5-D66C-48FB-9ABD-9C1BA1698F42}"/>
               </a:ext>
             </a:extLst>
@@ -5033,7 +5711,7 @@
 </p:sld>
 </file>
 
-<file path=ppt/slides/slide21.xml><?xml version="1.0" encoding="utf-8"?>
+<file path=ppt/slides/slide24.xml><?xml version="1.0" encoding="utf-8"?>
 <p:sld xmlns:a="http://schemas.openxmlformats.org/drawingml/2006/main" xmlns:r="http://schemas.openxmlformats.org/officeDocument/2006/relationships" xmlns:p="http://schemas.openxmlformats.org/presentationml/2006/main">
   <p:cSld>
     <p:spTree>
@@ -5122,7 +5800,7 @@
 </p:sld>
 </file>
 
-<file path=ppt/slides/slide22.xml><?xml version="1.0" encoding="utf-8"?>
+<file path=ppt/slides/slide25.xml><?xml version="1.0" encoding="utf-8"?>
 <p:sld xmlns:a="http://schemas.openxmlformats.org/drawingml/2006/main" xmlns:r="http://schemas.openxmlformats.org/officeDocument/2006/relationships" xmlns:p="http://schemas.openxmlformats.org/presentationml/2006/main">
   <p:cSld>
     <p:spTree>
@@ -5215,7 +5893,7 @@
             <p:spPr>
               <a:xfrm>
                 <a:off x="838199" y="4669718"/>
-                <a:ext cx="10515599" cy="1200329"/>
+                <a:ext cx="10515599" cy="1938992"/>
               </a:xfrm>
               <a:prstGeom prst="rect">
                 <a:avLst/>
@@ -5228,6 +5906,10 @@
               </a:bodyPr>
               <a:lstStyle/>
               <a:p>
+                <a:pPr marL="342900" indent="-342900">
+                  <a:buFont typeface="Arial" panose="020B0604020202020204" pitchFamily="34" charset="0"/>
+                  <a:buChar char="•"/>
+                </a:pPr>
                 <a:r>
                   <a:rPr lang="en-US" sz="2400" dirty="0"/>
                   <a:t>Discriminator is a multi-class classifier for </a:t>
@@ -5264,10 +5946,52 @@
                 </a14:m>
                 <a:r>
                   <a:rPr lang="en-US" sz="2400" b="0" dirty="0"/>
-                  <a:t> and a fake class. Trained to classify unlabeled samples into the correct class.</a:t>
+                  <a:t> and a fake class</a:t>
                 </a:r>
               </a:p>
               <a:p>
+                <a:pPr marL="342900" indent="-342900">
+                  <a:buFont typeface="Arial" panose="020B0604020202020204" pitchFamily="34" charset="0"/>
+                  <a:buChar char="•"/>
+                </a:pPr>
+                <a:r>
+                  <a:rPr lang="en-US" sz="2400" b="0" dirty="0"/>
+                  <a:t>Unlabeled data should go to any </a:t>
+                </a:r>
+                <a:r>
+                  <a:rPr lang="en-US" sz="2400" dirty="0"/>
+                  <a:t>of the </a:t>
+                </a:r>
+                <a14:m>
+                  <m:oMath xmlns:m="http://schemas.openxmlformats.org/officeDocument/2006/math">
+                    <m:r>
+                      <a:rPr lang="en-US" sz="2400" b="0" i="1" smtClean="0">
+                        <a:latin typeface="Cambria Math" panose="02040503050406030204" pitchFamily="18" charset="0"/>
+                      </a:rPr>
+                      <m:t>𝑘</m:t>
+                    </m:r>
+                  </m:oMath>
+                </a14:m>
+                <a:r>
+                  <a:rPr lang="en-US" sz="2400" dirty="0"/>
+                  <a:t> classes</a:t>
+                </a:r>
+              </a:p>
+              <a:p>
+                <a:pPr marL="342900" indent="-342900">
+                  <a:buFont typeface="Arial" panose="020B0604020202020204" pitchFamily="34" charset="0"/>
+                  <a:buChar char="•"/>
+                </a:pPr>
+                <a:r>
+                  <a:rPr lang="en-US" sz="2400" b="0" dirty="0"/>
+                  <a:t>Trained to classify data from aggregated teacher samples into the correct class</a:t>
+                </a:r>
+              </a:p>
+              <a:p>
+                <a:pPr marL="342900" indent="-342900">
+                  <a:buFont typeface="Arial" panose="020B0604020202020204" pitchFamily="34" charset="0"/>
+                  <a:buChar char="•"/>
+                </a:pPr>
                 <a:endParaRPr lang="en-US" sz="2400" b="0" dirty="0"/>
               </a:p>
             </p:txBody>
@@ -5291,7 +6015,7 @@
             <p:spPr>
               <a:xfrm>
                 <a:off x="838199" y="4669718"/>
-                <a:ext cx="10515599" cy="1200329"/>
+                <a:ext cx="10515599" cy="1938992"/>
               </a:xfrm>
               <a:prstGeom prst="rect">
                 <a:avLst/>
@@ -5299,7 +6023,7 @@
               <a:blipFill>
                 <a:blip r:embed="rId3"/>
                 <a:stretch>
-                  <a:fillRect l="-844" t="-3158"/>
+                  <a:fillRect l="-724" t="-1961" r="-724"/>
                 </a:stretch>
               </a:blipFill>
             </p:spPr>
@@ -5331,7 +6055,7 @@
 </p:sld>
 </file>
 
-<file path=ppt/slides/slide23.xml><?xml version="1.0" encoding="utf-8"?>
+<file path=ppt/slides/slide26.xml><?xml version="1.0" encoding="utf-8"?>
 <p:sld xmlns:a="http://schemas.openxmlformats.org/drawingml/2006/main" xmlns:r="http://schemas.openxmlformats.org/officeDocument/2006/relationships" xmlns:p="http://schemas.openxmlformats.org/presentationml/2006/main">
   <p:cSld>
     <p:spTree>
@@ -5407,6 +6131,146 @@
           </a:prstGeom>
         </p:spPr>
       </p:pic>
+      <mc:AlternateContent xmlns:mc="http://schemas.openxmlformats.org/markup-compatibility/2006">
+        <mc:Choice xmlns:a14="http://schemas.microsoft.com/office/drawing/2010/main" Requires="a14">
+          <p:sp>
+            <p:nvSpPr>
+              <p:cNvPr id="3" name="TextBox 2">
+                <a:extLst>
+                  <a:ext uri="{FF2B5EF4-FFF2-40B4-BE49-F238E27FC236}">
+                    <a16:creationId xmlns:a16="http://schemas.microsoft.com/office/drawing/2014/main" id="{E8C1BE69-E2A1-294F-ABD4-B6484A517782}"/>
+                  </a:ext>
+                </a:extLst>
+              </p:cNvPr>
+              <p:cNvSpPr txBox="1"/>
+              <p:nvPr/>
+            </p:nvSpPr>
+            <p:spPr>
+              <a:xfrm>
+                <a:off x="1290918" y="5013064"/>
+                <a:ext cx="7433534" cy="372410"/>
+              </a:xfrm>
+              <a:prstGeom prst="rect">
+                <a:avLst/>
+              </a:prstGeom>
+              <a:noFill/>
+            </p:spPr>
+            <p:txBody>
+              <a:bodyPr wrap="square" rtlCol="0">
+                <a:spAutoFit/>
+              </a:bodyPr>
+              <a:lstStyle/>
+              <a:p>
+                <a:r>
+                  <a:rPr lang="en-US" dirty="0"/>
+                  <a:t>Previous paper achieved </a:t>
+                </a:r>
+                <a14:m>
+                  <m:oMath xmlns:m="http://schemas.openxmlformats.org/officeDocument/2006/math">
+                    <m:r>
+                      <a:rPr lang="en-US" i="1" dirty="0" smtClean="0">
+                        <a:latin typeface="Cambria Math" panose="02040503050406030204" pitchFamily="18" charset="0"/>
+                      </a:rPr>
+                      <m:t>(</m:t>
+                    </m:r>
+                    <m:r>
+                      <a:rPr lang="en-US" b="0" i="1" dirty="0" smtClean="0">
+                        <a:latin typeface="Cambria Math" panose="02040503050406030204" pitchFamily="18" charset="0"/>
+                      </a:rPr>
+                      <m:t>8</m:t>
+                    </m:r>
+                    <m:r>
+                      <a:rPr lang="en-US" i="1" dirty="0">
+                        <a:latin typeface="Cambria Math" panose="02040503050406030204" pitchFamily="18" charset="0"/>
+                      </a:rPr>
+                      <m:t>, </m:t>
+                    </m:r>
+                    <m:sSup>
+                      <m:sSupPr>
+                        <m:ctrlPr>
+                          <a:rPr lang="en-US" b="0" i="1" dirty="0" smtClean="0">
+                            <a:latin typeface="Cambria Math" panose="02040503050406030204" pitchFamily="18" charset="0"/>
+                          </a:rPr>
+                        </m:ctrlPr>
+                      </m:sSupPr>
+                      <m:e>
+                        <m:r>
+                          <a:rPr lang="en-US" i="1" dirty="0">
+                            <a:latin typeface="Cambria Math" panose="02040503050406030204" pitchFamily="18" charset="0"/>
+                          </a:rPr>
+                          <m:t>10</m:t>
+                        </m:r>
+                      </m:e>
+                      <m:sup>
+                        <m:r>
+                          <a:rPr lang="en-US" b="0" i="1" dirty="0" smtClean="0">
+                            <a:latin typeface="Cambria Math" panose="02040503050406030204" pitchFamily="18" charset="0"/>
+                          </a:rPr>
+                          <m:t>−5</m:t>
+                        </m:r>
+                      </m:sup>
+                    </m:sSup>
+                    <m:r>
+                      <a:rPr lang="en-US" i="1" dirty="0" smtClean="0">
+                        <a:latin typeface="Cambria Math" panose="02040503050406030204" pitchFamily="18" charset="0"/>
+                      </a:rPr>
+                      <m:t>) </m:t>
+                    </m:r>
+                  </m:oMath>
+                </a14:m>
+                <a:r>
+                  <a:rPr lang="en-US" dirty="0"/>
+                  <a:t>privacy bound and 97% accuracy on MNIST</a:t>
+                </a:r>
+              </a:p>
+            </p:txBody>
+          </p:sp>
+        </mc:Choice>
+        <mc:Fallback>
+          <p:sp>
+            <p:nvSpPr>
+              <p:cNvPr id="3" name="TextBox 2">
+                <a:extLst>
+                  <a:ext uri="{FF2B5EF4-FFF2-40B4-BE49-F238E27FC236}">
+                    <a16:creationId xmlns:a16="http://schemas.microsoft.com/office/drawing/2014/main" id="{E8C1BE69-E2A1-294F-ABD4-B6484A517782}"/>
+                  </a:ext>
+                </a:extLst>
+              </p:cNvPr>
+              <p:cNvSpPr txBox="1">
+                <a:spLocks noRot="1" noChangeAspect="1" noMove="1" noResize="1" noEditPoints="1" noAdjustHandles="1" noChangeArrowheads="1" noChangeShapeType="1" noTextEdit="1"/>
+              </p:cNvSpPr>
+              <p:nvPr/>
+            </p:nvSpPr>
+            <p:spPr>
+              <a:xfrm>
+                <a:off x="1290918" y="5013064"/>
+                <a:ext cx="7433534" cy="372410"/>
+              </a:xfrm>
+              <a:prstGeom prst="rect">
+                <a:avLst/>
+              </a:prstGeom>
+              <a:blipFill>
+                <a:blip r:embed="rId3"/>
+                <a:stretch>
+                  <a:fillRect l="-683" t="-6667" r="-512" b="-23333"/>
+                </a:stretch>
+              </a:blipFill>
+            </p:spPr>
+            <p:txBody>
+              <a:bodyPr/>
+              <a:lstStyle/>
+              <a:p>
+                <a:r>
+                  <a:rPr lang="en-US">
+                    <a:noFill/>
+                  </a:rPr>
+                  <a:t> </a:t>
+                </a:r>
+              </a:p>
+            </p:txBody>
+          </p:sp>
+        </mc:Fallback>
+      </mc:AlternateContent>
     </p:spTree>
     <p:extLst>
       <p:ext uri="{BB962C8B-B14F-4D97-AF65-F5344CB8AC3E}">
@@ -5420,7 +6284,7 @@
 </p:sld>
 </file>
 
-<file path=ppt/slides/slide24.xml><?xml version="1.0" encoding="utf-8"?>
+<file path=ppt/slides/slide27.xml><?xml version="1.0" encoding="utf-8"?>
 <p:sld xmlns:a="http://schemas.openxmlformats.org/drawingml/2006/main" xmlns:r="http://schemas.openxmlformats.org/officeDocument/2006/relationships" xmlns:p="http://schemas.openxmlformats.org/presentationml/2006/main">
   <p:cSld>
     <p:spTree>
@@ -5461,7 +6325,7 @@
             <a:pPr algn="ctr"/>
             <a:r>
               <a:rPr lang="en-US" dirty="0"/>
-              <a:t>Advantages</a:t>
+              <a:t>Conclusion</a:t>
             </a:r>
           </a:p>
         </p:txBody>
@@ -5486,6 +6350,15 @@
         <p:txBody>
           <a:bodyPr/>
           <a:lstStyle/>
+          <a:p>
+            <a:pPr marL="0" indent="0">
+              <a:buNone/>
+            </a:pPr>
+            <a:r>
+              <a:rPr lang="en-US" dirty="0"/>
+              <a:t>Advantages:</a:t>
+            </a:r>
+          </a:p>
           <a:p>
             <a:r>
               <a:rPr lang="en-US" dirty="0"/>
@@ -5502,6 +6375,27 @@
             <a:r>
               <a:rPr lang="en-US" dirty="0"/>
               <a:t>SOTA Tradeoffs between accuracy and privacy</a:t>
+            </a:r>
+          </a:p>
+          <a:p>
+            <a:pPr marL="0" indent="0">
+              <a:buNone/>
+            </a:pPr>
+            <a:endParaRPr lang="en-US" dirty="0"/>
+          </a:p>
+          <a:p>
+            <a:pPr marL="0" indent="0">
+              <a:buNone/>
+            </a:pPr>
+            <a:r>
+              <a:rPr lang="en-US" dirty="0"/>
+              <a:t>Disadvantages:</a:t>
+            </a:r>
+          </a:p>
+          <a:p>
+            <a:r>
+              <a:rPr lang="en-US" dirty="0"/>
+              <a:t>Currently assume that teacher classifier arbitrarily changes with just one training example change -&gt; Bound could potentially be made tighter</a:t>
             </a:r>
           </a:p>
         </p:txBody>
@@ -5519,7 +6413,7 @@
 </p:sld>
 </file>
 
-<file path=ppt/slides/slide25.xml><?xml version="1.0" encoding="utf-8"?>
+<file path=ppt/slides/slide28.xml><?xml version="1.0" encoding="utf-8"?>
 <p:sld xmlns:a="http://schemas.openxmlformats.org/drawingml/2006/main" xmlns:r="http://schemas.openxmlformats.org/officeDocument/2006/relationships" xmlns:p="http://schemas.openxmlformats.org/presentationml/2006/main">
   <p:cSld>
     <p:spTree>
@@ -5558,7 +6452,7 @@
         </p:blipFill>
         <p:spPr>
           <a:xfrm>
-            <a:off x="1828801" y="1005536"/>
+            <a:off x="1169470" y="1323994"/>
             <a:ext cx="9853060" cy="4210012"/>
           </a:xfrm>
           <a:prstGeom prst="rect">
@@ -5579,7 +6473,7 @@
 </p:sld>
 </file>
 
-<file path=ppt/slides/slide26.xml><?xml version="1.0" encoding="utf-8"?>
+<file path=ppt/slides/slide29.xml><?xml version="1.0" encoding="utf-8"?>
 <p:sld xmlns:a="http://schemas.openxmlformats.org/drawingml/2006/main" xmlns:r="http://schemas.openxmlformats.org/officeDocument/2006/relationships" xmlns:p="http://schemas.openxmlformats.org/presentationml/2006/main">
   <p:cSld>
     <p:spTree>
@@ -5668,413 +6562,6 @@
 </p:sld>
 </file>
 
-<file path=ppt/slides/slide27.xml><?xml version="1.0" encoding="utf-8"?>
-<p:sld xmlns:a="http://schemas.openxmlformats.org/drawingml/2006/main" xmlns:r="http://schemas.openxmlformats.org/officeDocument/2006/relationships" xmlns:p="http://schemas.openxmlformats.org/presentationml/2006/main">
-  <p:cSld>
-    <p:spTree>
-      <p:nvGrpSpPr>
-        <p:cNvPr id="1" name=""/>
-        <p:cNvGrpSpPr/>
-        <p:nvPr/>
-      </p:nvGrpSpPr>
-      <p:grpSpPr>
-        <a:xfrm>
-          <a:off x="0" y="0"/>
-          <a:ext cx="0" cy="0"/>
-          <a:chOff x="0" y="0"/>
-          <a:chExt cx="0" cy="0"/>
-        </a:xfrm>
-      </p:grpSpPr>
-      <p:sp>
-        <p:nvSpPr>
-          <p:cNvPr id="2" name="Title 1">
-            <a:extLst>
-              <a:ext uri="{FF2B5EF4-FFF2-40B4-BE49-F238E27FC236}">
-                <a16:creationId xmlns:a16="http://schemas.microsoft.com/office/drawing/2014/main" id="{EC1D67B7-9710-E844-B52C-698593336A05}"/>
-              </a:ext>
-            </a:extLst>
-          </p:cNvPr>
-          <p:cNvSpPr>
-            <a:spLocks noGrp="1"/>
-          </p:cNvSpPr>
-          <p:nvPr>
-            <p:ph type="title"/>
-          </p:nvPr>
-        </p:nvSpPr>
-        <p:spPr>
-          <a:xfrm>
-            <a:off x="838200" y="365125"/>
-            <a:ext cx="10515600" cy="1325563"/>
-          </a:xfrm>
-        </p:spPr>
-        <p:txBody>
-          <a:bodyPr/>
-          <a:lstStyle/>
-          <a:p>
-            <a:pPr algn="ctr"/>
-            <a:r>
-              <a:rPr lang="en-US"/>
-              <a:t>PATE-GAN</a:t>
-            </a:r>
-            <a:endParaRPr lang="en-US" dirty="0"/>
-          </a:p>
-        </p:txBody>
-      </p:sp>
-      <p:pic>
-        <p:nvPicPr>
-          <p:cNvPr id="5" name="Picture 4">
-            <a:extLst>
-              <a:ext uri="{FF2B5EF4-FFF2-40B4-BE49-F238E27FC236}">
-                <a16:creationId xmlns:a16="http://schemas.microsoft.com/office/drawing/2014/main" id="{C82CCDB6-0F6E-EF45-A9A1-1EF7AAF65361}"/>
-              </a:ext>
-            </a:extLst>
-          </p:cNvPr>
-          <p:cNvPicPr>
-            <a:picLocks noChangeAspect="1"/>
-          </p:cNvPicPr>
-          <p:nvPr/>
-        </p:nvPicPr>
-        <p:blipFill>
-          <a:blip r:embed="rId2"/>
-          <a:stretch>
-            <a:fillRect/>
-          </a:stretch>
-        </p:blipFill>
-        <p:spPr>
-          <a:xfrm>
-            <a:off x="3828531" y="1375644"/>
-            <a:ext cx="4534937" cy="2283939"/>
-          </a:xfrm>
-          <a:prstGeom prst="rect">
-            <a:avLst/>
-          </a:prstGeom>
-        </p:spPr>
-      </p:pic>
-      <p:pic>
-        <p:nvPicPr>
-          <p:cNvPr id="6" name="Picture 5">
-            <a:extLst>
-              <a:ext uri="{FF2B5EF4-FFF2-40B4-BE49-F238E27FC236}">
-                <a16:creationId xmlns:a16="http://schemas.microsoft.com/office/drawing/2014/main" id="{35EA3438-4D59-B04E-B17B-27E230973466}"/>
-              </a:ext>
-            </a:extLst>
-          </p:cNvPr>
-          <p:cNvPicPr>
-            <a:picLocks noChangeAspect="1"/>
-          </p:cNvPicPr>
-          <p:nvPr/>
-        </p:nvPicPr>
-        <p:blipFill>
-          <a:blip r:embed="rId3"/>
-          <a:stretch>
-            <a:fillRect/>
-          </a:stretch>
-        </p:blipFill>
-        <p:spPr>
-          <a:xfrm>
-            <a:off x="2415605" y="3659583"/>
-            <a:ext cx="7360787" cy="2738492"/>
-          </a:xfrm>
-          <a:prstGeom prst="rect">
-            <a:avLst/>
-          </a:prstGeom>
-        </p:spPr>
-      </p:pic>
-      <p:sp>
-        <p:nvSpPr>
-          <p:cNvPr id="7" name="TextBox 6">
-            <a:extLst>
-              <a:ext uri="{FF2B5EF4-FFF2-40B4-BE49-F238E27FC236}">
-                <a16:creationId xmlns:a16="http://schemas.microsoft.com/office/drawing/2014/main" id="{8C6E6ECA-7021-AB47-84EC-4806F94BAEA1}"/>
-              </a:ext>
-            </a:extLst>
-          </p:cNvPr>
-          <p:cNvSpPr txBox="1"/>
-          <p:nvPr/>
-        </p:nvSpPr>
-        <p:spPr>
-          <a:xfrm>
-            <a:off x="1116531" y="1809549"/>
-            <a:ext cx="2492943" cy="646331"/>
-          </a:xfrm>
-          <a:prstGeom prst="rect">
-            <a:avLst/>
-          </a:prstGeom>
-          <a:noFill/>
-        </p:spPr>
-        <p:txBody>
-          <a:bodyPr wrap="square" rtlCol="0">
-            <a:spAutoFit/>
-          </a:bodyPr>
-          <a:lstStyle/>
-          <a:p>
-            <a:r>
-              <a:rPr lang="en-US" dirty="0"/>
-              <a:t>Training Procedure for Teacher Discriminators</a:t>
-            </a:r>
-          </a:p>
-        </p:txBody>
-      </p:sp>
-      <p:sp>
-        <p:nvSpPr>
-          <p:cNvPr id="10" name="TextBox 9">
-            <a:extLst>
-              <a:ext uri="{FF2B5EF4-FFF2-40B4-BE49-F238E27FC236}">
-                <a16:creationId xmlns:a16="http://schemas.microsoft.com/office/drawing/2014/main" id="{D90E8DA2-A7CB-9148-8945-E93FB937808A}"/>
-              </a:ext>
-            </a:extLst>
-          </p:cNvPr>
-          <p:cNvSpPr txBox="1"/>
-          <p:nvPr/>
-        </p:nvSpPr>
-        <p:spPr>
-          <a:xfrm>
-            <a:off x="768417" y="3896627"/>
-            <a:ext cx="2492943" cy="646331"/>
-          </a:xfrm>
-          <a:prstGeom prst="rect">
-            <a:avLst/>
-          </a:prstGeom>
-          <a:noFill/>
-        </p:spPr>
-        <p:txBody>
-          <a:bodyPr wrap="square" rtlCol="0">
-            <a:spAutoFit/>
-          </a:bodyPr>
-          <a:lstStyle/>
-          <a:p>
-            <a:r>
-              <a:rPr lang="en-US" dirty="0"/>
-              <a:t>Training Procedure for Generator and Student</a:t>
-            </a:r>
-          </a:p>
-        </p:txBody>
-      </p:sp>
-    </p:spTree>
-    <p:extLst>
-      <p:ext uri="{BB962C8B-B14F-4D97-AF65-F5344CB8AC3E}">
-        <p14:creationId xmlns:p14="http://schemas.microsoft.com/office/powerpoint/2010/main" val="2897006200"/>
-      </p:ext>
-    </p:extLst>
-  </p:cSld>
-  <p:clrMapOvr>
-    <a:masterClrMapping/>
-  </p:clrMapOvr>
-</p:sld>
-</file>
-
-<file path=ppt/slides/slide28.xml><?xml version="1.0" encoding="utf-8"?>
-<p:sld xmlns:a="http://schemas.openxmlformats.org/drawingml/2006/main" xmlns:r="http://schemas.openxmlformats.org/officeDocument/2006/relationships" xmlns:p="http://schemas.openxmlformats.org/presentationml/2006/main">
-  <p:cSld>
-    <p:spTree>
-      <p:nvGrpSpPr>
-        <p:cNvPr id="1" name=""/>
-        <p:cNvGrpSpPr/>
-        <p:nvPr/>
-      </p:nvGrpSpPr>
-      <p:grpSpPr>
-        <a:xfrm>
-          <a:off x="0" y="0"/>
-          <a:ext cx="0" cy="0"/>
-          <a:chOff x="0" y="0"/>
-          <a:chExt cx="0" cy="0"/>
-        </a:xfrm>
-      </p:grpSpPr>
-      <p:sp>
-        <p:nvSpPr>
-          <p:cNvPr id="2" name="Title 1">
-            <a:extLst>
-              <a:ext uri="{FF2B5EF4-FFF2-40B4-BE49-F238E27FC236}">
-                <a16:creationId xmlns:a16="http://schemas.microsoft.com/office/drawing/2014/main" id="{E9E260B4-F552-B248-9446-E6E7674C056D}"/>
-              </a:ext>
-            </a:extLst>
-          </p:cNvPr>
-          <p:cNvSpPr>
-            <a:spLocks noGrp="1"/>
-          </p:cNvSpPr>
-          <p:nvPr>
-            <p:ph type="title"/>
-          </p:nvPr>
-        </p:nvSpPr>
-        <p:spPr>
-          <a:xfrm>
-            <a:off x="838200" y="365125"/>
-            <a:ext cx="10515600" cy="1325563"/>
-          </a:xfrm>
-        </p:spPr>
-        <p:txBody>
-          <a:bodyPr/>
-          <a:lstStyle/>
-          <a:p>
-            <a:pPr algn="ctr"/>
-            <a:r>
-              <a:rPr lang="en-US" dirty="0"/>
-              <a:t>Results</a:t>
-            </a:r>
-          </a:p>
-        </p:txBody>
-      </p:sp>
-      <p:pic>
-        <p:nvPicPr>
-          <p:cNvPr id="4" name="Picture 3">
-            <a:extLst>
-              <a:ext uri="{FF2B5EF4-FFF2-40B4-BE49-F238E27FC236}">
-                <a16:creationId xmlns:a16="http://schemas.microsoft.com/office/drawing/2014/main" id="{73FEE4BD-778B-A647-BD7A-E47CCC7DF893}"/>
-              </a:ext>
-            </a:extLst>
-          </p:cNvPr>
-          <p:cNvPicPr>
-            <a:picLocks noChangeAspect="1"/>
-          </p:cNvPicPr>
-          <p:nvPr/>
-        </p:nvPicPr>
-        <p:blipFill>
-          <a:blip r:embed="rId2"/>
-          <a:stretch>
-            <a:fillRect/>
-          </a:stretch>
-        </p:blipFill>
-        <p:spPr>
-          <a:xfrm>
-            <a:off x="2586936" y="1363429"/>
-            <a:ext cx="7018127" cy="4701381"/>
-          </a:xfrm>
-          <a:prstGeom prst="rect">
-            <a:avLst/>
-          </a:prstGeom>
-        </p:spPr>
-      </p:pic>
-    </p:spTree>
-    <p:extLst>
-      <p:ext uri="{BB962C8B-B14F-4D97-AF65-F5344CB8AC3E}">
-        <p14:creationId xmlns:p14="http://schemas.microsoft.com/office/powerpoint/2010/main" val="3215200018"/>
-      </p:ext>
-    </p:extLst>
-  </p:cSld>
-  <p:clrMapOvr>
-    <a:masterClrMapping/>
-  </p:clrMapOvr>
-</p:sld>
-</file>
-
-<file path=ppt/slides/slide29.xml><?xml version="1.0" encoding="utf-8"?>
-<p:sld xmlns:a="http://schemas.openxmlformats.org/drawingml/2006/main" xmlns:r="http://schemas.openxmlformats.org/officeDocument/2006/relationships" xmlns:p="http://schemas.openxmlformats.org/presentationml/2006/main">
-  <p:cSld>
-    <p:spTree>
-      <p:nvGrpSpPr>
-        <p:cNvPr id="1" name=""/>
-        <p:cNvGrpSpPr/>
-        <p:nvPr/>
-      </p:nvGrpSpPr>
-      <p:grpSpPr>
-        <a:xfrm>
-          <a:off x="0" y="0"/>
-          <a:ext cx="0" cy="0"/>
-          <a:chOff x="0" y="0"/>
-          <a:chExt cx="0" cy="0"/>
-        </a:xfrm>
-      </p:grpSpPr>
-      <p:sp>
-        <p:nvSpPr>
-          <p:cNvPr id="2" name="Title 1">
-            <a:extLst>
-              <a:ext uri="{FF2B5EF4-FFF2-40B4-BE49-F238E27FC236}">
-                <a16:creationId xmlns:a16="http://schemas.microsoft.com/office/drawing/2014/main" id="{777E9754-FAF4-C84C-8EAF-9B37886033F1}"/>
-              </a:ext>
-            </a:extLst>
-          </p:cNvPr>
-          <p:cNvSpPr>
-            <a:spLocks noGrp="1"/>
-          </p:cNvSpPr>
-          <p:nvPr>
-            <p:ph type="title"/>
-          </p:nvPr>
-        </p:nvSpPr>
-        <p:spPr/>
-        <p:txBody>
-          <a:bodyPr/>
-          <a:lstStyle/>
-          <a:p>
-            <a:r>
-              <a:rPr lang="en-US" dirty="0"/>
-              <a:t>Sources</a:t>
-            </a:r>
-          </a:p>
-        </p:txBody>
-      </p:sp>
-      <p:sp>
-        <p:nvSpPr>
-          <p:cNvPr id="3" name="Content Placeholder 2">
-            <a:extLst>
-              <a:ext uri="{FF2B5EF4-FFF2-40B4-BE49-F238E27FC236}">
-                <a16:creationId xmlns:a16="http://schemas.microsoft.com/office/drawing/2014/main" id="{B81C33BD-933E-6546-847A-6360442B5570}"/>
-              </a:ext>
-            </a:extLst>
-          </p:cNvPr>
-          <p:cNvSpPr>
-            <a:spLocks noGrp="1"/>
-          </p:cNvSpPr>
-          <p:nvPr>
-            <p:ph idx="1"/>
-          </p:nvPr>
-        </p:nvSpPr>
-        <p:spPr/>
-        <p:txBody>
-          <a:bodyPr/>
-          <a:lstStyle/>
-          <a:p>
-            <a:r>
-              <a:rPr lang="en-US" dirty="0"/>
-              <a:t>Deep Learning with Differential Privacy, Abadi et al. 2016.</a:t>
-            </a:r>
-          </a:p>
-          <a:p>
-            <a:r>
-              <a:rPr lang="en-US" dirty="0"/>
-              <a:t>Deep Learning with Differential Privacy, CCS 2016 Presentation.</a:t>
-            </a:r>
-          </a:p>
-          <a:p>
-            <a:r>
-              <a:rPr lang="en-US" dirty="0"/>
-              <a:t> Semi-Supervised Knowledge Transfer for Deep Learning from Private Training Data, </a:t>
-            </a:r>
-            <a:r>
-              <a:rPr lang="en-US" dirty="0" err="1"/>
-              <a:t>Papernot</a:t>
-            </a:r>
-            <a:r>
-              <a:rPr lang="en-US" dirty="0"/>
-              <a:t> et al. 2017.</a:t>
-            </a:r>
-          </a:p>
-          <a:p>
-            <a:r>
-              <a:rPr lang="en-US" dirty="0"/>
-              <a:t>Semi-Supervised Knowledge Transfer for Deep Learning from Private Training Data, ICLR 2017 Presentation.</a:t>
-            </a:r>
-          </a:p>
-          <a:p>
-            <a:r>
-              <a:rPr lang="en-US" dirty="0"/>
-              <a:t>PATE-GAN: Generating Synthetic Data with Differential Privacy Guarantees, Jordan et al. 2019.</a:t>
-            </a:r>
-          </a:p>
-        </p:txBody>
-      </p:sp>
-    </p:spTree>
-    <p:extLst>
-      <p:ext uri="{BB962C8B-B14F-4D97-AF65-F5344CB8AC3E}">
-        <p14:creationId xmlns:p14="http://schemas.microsoft.com/office/powerpoint/2010/main" val="516303393"/>
-      </p:ext>
-    </p:extLst>
-  </p:cSld>
-  <p:clrMapOvr>
-    <a:masterClrMapping/>
-  </p:clrMapOvr>
-</p:sld>
-</file>
-
 <file path=ppt/slides/slide3.xml><?xml version="1.0" encoding="utf-8"?>
 <p:sld xmlns:a="http://schemas.openxmlformats.org/drawingml/2006/main" xmlns:r="http://schemas.openxmlformats.org/officeDocument/2006/relationships" xmlns:p="http://schemas.openxmlformats.org/presentationml/2006/main">
   <p:cSld>
@@ -6092,8 +6579,8 @@
           <a:chExt cx="0" cy="0"/>
         </a:xfrm>
       </p:grpSpPr>
-      <mc:AlternateContent xmlns:mc="http://schemas.openxmlformats.org/markup-compatibility/2006">
-        <mc:Choice xmlns:a14="http://schemas.microsoft.com/office/drawing/2010/main" Requires="a14">
+      <mc:AlternateContent xmlns:mc="http://schemas.openxmlformats.org/markup-compatibility/2006" xmlns:a14="http://schemas.microsoft.com/office/drawing/2010/main">
+        <mc:Choice Requires="a14">
           <p:sp>
             <p:nvSpPr>
               <p:cNvPr id="2" name="Title 1">
@@ -6164,7 +6651,7 @@
             </p:txBody>
           </p:sp>
         </mc:Choice>
-        <mc:Fallback>
+        <mc:Fallback xmlns="">
           <p:sp>
             <p:nvSpPr>
               <p:cNvPr id="2" name="Title 1">
@@ -6399,7 +6886,664 @@
 </p:sld>
 </file>
 
+<file path=ppt/slides/slide30.xml><?xml version="1.0" encoding="utf-8"?>
+<p:sld xmlns:a="http://schemas.openxmlformats.org/drawingml/2006/main" xmlns:r="http://schemas.openxmlformats.org/officeDocument/2006/relationships" xmlns:p="http://schemas.openxmlformats.org/presentationml/2006/main">
+  <p:cSld>
+    <p:spTree>
+      <p:nvGrpSpPr>
+        <p:cNvPr id="1" name=""/>
+        <p:cNvGrpSpPr/>
+        <p:nvPr/>
+      </p:nvGrpSpPr>
+      <p:grpSpPr>
+        <a:xfrm>
+          <a:off x="0" y="0"/>
+          <a:ext cx="0" cy="0"/>
+          <a:chOff x="0" y="0"/>
+          <a:chExt cx="0" cy="0"/>
+        </a:xfrm>
+      </p:grpSpPr>
+      <p:sp>
+        <p:nvSpPr>
+          <p:cNvPr id="2" name="Title 1">
+            <a:extLst>
+              <a:ext uri="{FF2B5EF4-FFF2-40B4-BE49-F238E27FC236}">
+                <a16:creationId xmlns:a16="http://schemas.microsoft.com/office/drawing/2014/main" id="{EC1D67B7-9710-E844-B52C-698593336A05}"/>
+              </a:ext>
+            </a:extLst>
+          </p:cNvPr>
+          <p:cNvSpPr>
+            <a:spLocks noGrp="1"/>
+          </p:cNvSpPr>
+          <p:nvPr>
+            <p:ph type="title"/>
+          </p:nvPr>
+        </p:nvSpPr>
+        <p:spPr>
+          <a:xfrm>
+            <a:off x="838200" y="365125"/>
+            <a:ext cx="10515600" cy="1325563"/>
+          </a:xfrm>
+        </p:spPr>
+        <p:txBody>
+          <a:bodyPr/>
+          <a:lstStyle/>
+          <a:p>
+            <a:pPr algn="ctr"/>
+            <a:r>
+              <a:rPr lang="en-US"/>
+              <a:t>PATE-GAN</a:t>
+            </a:r>
+            <a:endParaRPr lang="en-US" dirty="0"/>
+          </a:p>
+        </p:txBody>
+      </p:sp>
+      <p:pic>
+        <p:nvPicPr>
+          <p:cNvPr id="5" name="Picture 4">
+            <a:extLst>
+              <a:ext uri="{FF2B5EF4-FFF2-40B4-BE49-F238E27FC236}">
+                <a16:creationId xmlns:a16="http://schemas.microsoft.com/office/drawing/2014/main" id="{C82CCDB6-0F6E-EF45-A9A1-1EF7AAF65361}"/>
+              </a:ext>
+            </a:extLst>
+          </p:cNvPr>
+          <p:cNvPicPr>
+            <a:picLocks noChangeAspect="1"/>
+          </p:cNvPicPr>
+          <p:nvPr/>
+        </p:nvPicPr>
+        <p:blipFill>
+          <a:blip r:embed="rId2"/>
+          <a:stretch>
+            <a:fillRect/>
+          </a:stretch>
+        </p:blipFill>
+        <p:spPr>
+          <a:xfrm>
+            <a:off x="3828531" y="1375644"/>
+            <a:ext cx="4534937" cy="2283939"/>
+          </a:xfrm>
+          <a:prstGeom prst="rect">
+            <a:avLst/>
+          </a:prstGeom>
+        </p:spPr>
+      </p:pic>
+      <p:pic>
+        <p:nvPicPr>
+          <p:cNvPr id="6" name="Picture 5">
+            <a:extLst>
+              <a:ext uri="{FF2B5EF4-FFF2-40B4-BE49-F238E27FC236}">
+                <a16:creationId xmlns:a16="http://schemas.microsoft.com/office/drawing/2014/main" id="{35EA3438-4D59-B04E-B17B-27E230973466}"/>
+              </a:ext>
+            </a:extLst>
+          </p:cNvPr>
+          <p:cNvPicPr>
+            <a:picLocks noChangeAspect="1"/>
+          </p:cNvPicPr>
+          <p:nvPr/>
+        </p:nvPicPr>
+        <p:blipFill>
+          <a:blip r:embed="rId3"/>
+          <a:stretch>
+            <a:fillRect/>
+          </a:stretch>
+        </p:blipFill>
+        <p:spPr>
+          <a:xfrm>
+            <a:off x="2415605" y="3659583"/>
+            <a:ext cx="7360787" cy="2738492"/>
+          </a:xfrm>
+          <a:prstGeom prst="rect">
+            <a:avLst/>
+          </a:prstGeom>
+        </p:spPr>
+      </p:pic>
+      <p:sp>
+        <p:nvSpPr>
+          <p:cNvPr id="7" name="TextBox 6">
+            <a:extLst>
+              <a:ext uri="{FF2B5EF4-FFF2-40B4-BE49-F238E27FC236}">
+                <a16:creationId xmlns:a16="http://schemas.microsoft.com/office/drawing/2014/main" id="{8C6E6ECA-7021-AB47-84EC-4806F94BAEA1}"/>
+              </a:ext>
+            </a:extLst>
+          </p:cNvPr>
+          <p:cNvSpPr txBox="1"/>
+          <p:nvPr/>
+        </p:nvSpPr>
+        <p:spPr>
+          <a:xfrm>
+            <a:off x="1116531" y="1809549"/>
+            <a:ext cx="2492943" cy="646331"/>
+          </a:xfrm>
+          <a:prstGeom prst="rect">
+            <a:avLst/>
+          </a:prstGeom>
+          <a:noFill/>
+        </p:spPr>
+        <p:txBody>
+          <a:bodyPr wrap="square" rtlCol="0">
+            <a:spAutoFit/>
+          </a:bodyPr>
+          <a:lstStyle/>
+          <a:p>
+            <a:r>
+              <a:rPr lang="en-US" dirty="0"/>
+              <a:t>Training Procedure for Teacher Discriminators</a:t>
+            </a:r>
+          </a:p>
+        </p:txBody>
+      </p:sp>
+      <p:sp>
+        <p:nvSpPr>
+          <p:cNvPr id="10" name="TextBox 9">
+            <a:extLst>
+              <a:ext uri="{FF2B5EF4-FFF2-40B4-BE49-F238E27FC236}">
+                <a16:creationId xmlns:a16="http://schemas.microsoft.com/office/drawing/2014/main" id="{D90E8DA2-A7CB-9148-8945-E93FB937808A}"/>
+              </a:ext>
+            </a:extLst>
+          </p:cNvPr>
+          <p:cNvSpPr txBox="1"/>
+          <p:nvPr/>
+        </p:nvSpPr>
+        <p:spPr>
+          <a:xfrm>
+            <a:off x="768417" y="3896627"/>
+            <a:ext cx="2492943" cy="646331"/>
+          </a:xfrm>
+          <a:prstGeom prst="rect">
+            <a:avLst/>
+          </a:prstGeom>
+          <a:noFill/>
+        </p:spPr>
+        <p:txBody>
+          <a:bodyPr wrap="square" rtlCol="0">
+            <a:spAutoFit/>
+          </a:bodyPr>
+          <a:lstStyle/>
+          <a:p>
+            <a:r>
+              <a:rPr lang="en-US" dirty="0"/>
+              <a:t>Training Procedure for Generator and Student</a:t>
+            </a:r>
+          </a:p>
+        </p:txBody>
+      </p:sp>
+    </p:spTree>
+    <p:extLst>
+      <p:ext uri="{BB962C8B-B14F-4D97-AF65-F5344CB8AC3E}">
+        <p14:creationId xmlns:p14="http://schemas.microsoft.com/office/powerpoint/2010/main" val="2897006200"/>
+      </p:ext>
+    </p:extLst>
+  </p:cSld>
+  <p:clrMapOvr>
+    <a:masterClrMapping/>
+  </p:clrMapOvr>
+</p:sld>
+</file>
+
+<file path=ppt/slides/slide31.xml><?xml version="1.0" encoding="utf-8"?>
+<p:sld xmlns:a="http://schemas.openxmlformats.org/drawingml/2006/main" xmlns:r="http://schemas.openxmlformats.org/officeDocument/2006/relationships" xmlns:p="http://schemas.openxmlformats.org/presentationml/2006/main">
+  <p:cSld>
+    <p:spTree>
+      <p:nvGrpSpPr>
+        <p:cNvPr id="1" name=""/>
+        <p:cNvGrpSpPr/>
+        <p:nvPr/>
+      </p:nvGrpSpPr>
+      <p:grpSpPr>
+        <a:xfrm>
+          <a:off x="0" y="0"/>
+          <a:ext cx="0" cy="0"/>
+          <a:chOff x="0" y="0"/>
+          <a:chExt cx="0" cy="0"/>
+        </a:xfrm>
+      </p:grpSpPr>
+      <p:sp>
+        <p:nvSpPr>
+          <p:cNvPr id="2" name="Title 1">
+            <a:extLst>
+              <a:ext uri="{FF2B5EF4-FFF2-40B4-BE49-F238E27FC236}">
+                <a16:creationId xmlns:a16="http://schemas.microsoft.com/office/drawing/2014/main" id="{E9E260B4-F552-B248-9446-E6E7674C056D}"/>
+              </a:ext>
+            </a:extLst>
+          </p:cNvPr>
+          <p:cNvSpPr>
+            <a:spLocks noGrp="1"/>
+          </p:cNvSpPr>
+          <p:nvPr>
+            <p:ph type="title"/>
+          </p:nvPr>
+        </p:nvSpPr>
+        <p:spPr>
+          <a:xfrm>
+            <a:off x="838200" y="365125"/>
+            <a:ext cx="10515600" cy="1325563"/>
+          </a:xfrm>
+        </p:spPr>
+        <p:txBody>
+          <a:bodyPr/>
+          <a:lstStyle/>
+          <a:p>
+            <a:pPr algn="ctr"/>
+            <a:r>
+              <a:rPr lang="en-US" dirty="0"/>
+              <a:t>Results</a:t>
+            </a:r>
+          </a:p>
+        </p:txBody>
+      </p:sp>
+      <p:pic>
+        <p:nvPicPr>
+          <p:cNvPr id="4" name="Picture 3">
+            <a:extLst>
+              <a:ext uri="{FF2B5EF4-FFF2-40B4-BE49-F238E27FC236}">
+                <a16:creationId xmlns:a16="http://schemas.microsoft.com/office/drawing/2014/main" id="{73FEE4BD-778B-A647-BD7A-E47CCC7DF893}"/>
+              </a:ext>
+            </a:extLst>
+          </p:cNvPr>
+          <p:cNvPicPr>
+            <a:picLocks noChangeAspect="1"/>
+          </p:cNvPicPr>
+          <p:nvPr/>
+        </p:nvPicPr>
+        <p:blipFill>
+          <a:blip r:embed="rId2"/>
+          <a:stretch>
+            <a:fillRect/>
+          </a:stretch>
+        </p:blipFill>
+        <p:spPr>
+          <a:xfrm>
+            <a:off x="2586936" y="1363429"/>
+            <a:ext cx="7018127" cy="4701381"/>
+          </a:xfrm>
+          <a:prstGeom prst="rect">
+            <a:avLst/>
+          </a:prstGeom>
+        </p:spPr>
+      </p:pic>
+    </p:spTree>
+    <p:extLst>
+      <p:ext uri="{BB962C8B-B14F-4D97-AF65-F5344CB8AC3E}">
+        <p14:creationId xmlns:p14="http://schemas.microsoft.com/office/powerpoint/2010/main" val="3215200018"/>
+      </p:ext>
+    </p:extLst>
+  </p:cSld>
+  <p:clrMapOvr>
+    <a:masterClrMapping/>
+  </p:clrMapOvr>
+</p:sld>
+</file>
+
+<file path=ppt/slides/slide32.xml><?xml version="1.0" encoding="utf-8"?>
+<p:sld xmlns:a="http://schemas.openxmlformats.org/drawingml/2006/main" xmlns:r="http://schemas.openxmlformats.org/officeDocument/2006/relationships" xmlns:p="http://schemas.openxmlformats.org/presentationml/2006/main">
+  <p:cSld>
+    <p:spTree>
+      <p:nvGrpSpPr>
+        <p:cNvPr id="1" name=""/>
+        <p:cNvGrpSpPr/>
+        <p:nvPr/>
+      </p:nvGrpSpPr>
+      <p:grpSpPr>
+        <a:xfrm>
+          <a:off x="0" y="0"/>
+          <a:ext cx="0" cy="0"/>
+          <a:chOff x="0" y="0"/>
+          <a:chExt cx="0" cy="0"/>
+        </a:xfrm>
+      </p:grpSpPr>
+      <p:sp>
+        <p:nvSpPr>
+          <p:cNvPr id="2" name="Title 1">
+            <a:extLst>
+              <a:ext uri="{FF2B5EF4-FFF2-40B4-BE49-F238E27FC236}">
+                <a16:creationId xmlns:a16="http://schemas.microsoft.com/office/drawing/2014/main" id="{777E9754-FAF4-C84C-8EAF-9B37886033F1}"/>
+              </a:ext>
+            </a:extLst>
+          </p:cNvPr>
+          <p:cNvSpPr>
+            <a:spLocks noGrp="1"/>
+          </p:cNvSpPr>
+          <p:nvPr>
+            <p:ph type="title"/>
+          </p:nvPr>
+        </p:nvSpPr>
+        <p:spPr/>
+        <p:txBody>
+          <a:bodyPr/>
+          <a:lstStyle/>
+          <a:p>
+            <a:r>
+              <a:rPr lang="en-US" dirty="0"/>
+              <a:t>Sources</a:t>
+            </a:r>
+          </a:p>
+        </p:txBody>
+      </p:sp>
+      <p:sp>
+        <p:nvSpPr>
+          <p:cNvPr id="3" name="Content Placeholder 2">
+            <a:extLst>
+              <a:ext uri="{FF2B5EF4-FFF2-40B4-BE49-F238E27FC236}">
+                <a16:creationId xmlns:a16="http://schemas.microsoft.com/office/drawing/2014/main" id="{B81C33BD-933E-6546-847A-6360442B5570}"/>
+              </a:ext>
+            </a:extLst>
+          </p:cNvPr>
+          <p:cNvSpPr>
+            <a:spLocks noGrp="1"/>
+          </p:cNvSpPr>
+          <p:nvPr>
+            <p:ph idx="1"/>
+          </p:nvPr>
+        </p:nvSpPr>
+        <p:spPr/>
+        <p:txBody>
+          <a:bodyPr/>
+          <a:lstStyle/>
+          <a:p>
+            <a:r>
+              <a:rPr lang="en-US" dirty="0"/>
+              <a:t>Deep Learning with Differential Privacy, Abadi et al. 2016.</a:t>
+            </a:r>
+          </a:p>
+          <a:p>
+            <a:r>
+              <a:rPr lang="en-US" dirty="0"/>
+              <a:t>Deep Learning with Differential Privacy, CCS 2016 Presentation.</a:t>
+            </a:r>
+          </a:p>
+          <a:p>
+            <a:r>
+              <a:rPr lang="en-US" dirty="0"/>
+              <a:t> Semi-Supervised Knowledge Transfer for Deep Learning from Private Training Data, </a:t>
+            </a:r>
+            <a:r>
+              <a:rPr lang="en-US" dirty="0" err="1"/>
+              <a:t>Papernot</a:t>
+            </a:r>
+            <a:r>
+              <a:rPr lang="en-US" dirty="0"/>
+              <a:t> et al. 2017.</a:t>
+            </a:r>
+          </a:p>
+          <a:p>
+            <a:r>
+              <a:rPr lang="en-US" dirty="0"/>
+              <a:t>Semi-Supervised Knowledge Transfer for Deep Learning from Private Training Data, ICLR 2017 Presentation.</a:t>
+            </a:r>
+          </a:p>
+          <a:p>
+            <a:r>
+              <a:rPr lang="en-US" dirty="0"/>
+              <a:t>PATE-GAN: Generating Synthetic Data with Differential Privacy Guarantees, Jordan et al. 2019.</a:t>
+            </a:r>
+          </a:p>
+        </p:txBody>
+      </p:sp>
+    </p:spTree>
+    <p:extLst>
+      <p:ext uri="{BB962C8B-B14F-4D97-AF65-F5344CB8AC3E}">
+        <p14:creationId xmlns:p14="http://schemas.microsoft.com/office/powerpoint/2010/main" val="516303393"/>
+      </p:ext>
+    </p:extLst>
+  </p:cSld>
+  <p:clrMapOvr>
+    <a:masterClrMapping/>
+  </p:clrMapOvr>
+</p:sld>
+</file>
+
 <file path=ppt/slides/slide4.xml><?xml version="1.0" encoding="utf-8"?>
+<p:sld xmlns:a="http://schemas.openxmlformats.org/drawingml/2006/main" xmlns:r="http://schemas.openxmlformats.org/officeDocument/2006/relationships" xmlns:p="http://schemas.openxmlformats.org/presentationml/2006/main">
+  <p:cSld>
+    <p:spTree>
+      <p:nvGrpSpPr>
+        <p:cNvPr id="1" name=""/>
+        <p:cNvGrpSpPr/>
+        <p:nvPr/>
+      </p:nvGrpSpPr>
+      <p:grpSpPr>
+        <a:xfrm>
+          <a:off x="0" y="0"/>
+          <a:ext cx="0" cy="0"/>
+          <a:chOff x="0" y="0"/>
+          <a:chExt cx="0" cy="0"/>
+        </a:xfrm>
+      </p:grpSpPr>
+      <p:sp>
+        <p:nvSpPr>
+          <p:cNvPr id="2" name="Title 1">
+            <a:extLst>
+              <a:ext uri="{FF2B5EF4-FFF2-40B4-BE49-F238E27FC236}">
+                <a16:creationId xmlns:a16="http://schemas.microsoft.com/office/drawing/2014/main" id="{24EB91C1-18BD-B640-9545-AEA680F638BB}"/>
+              </a:ext>
+            </a:extLst>
+          </p:cNvPr>
+          <p:cNvSpPr>
+            <a:spLocks noGrp="1"/>
+          </p:cNvSpPr>
+          <p:nvPr>
+            <p:ph type="title"/>
+          </p:nvPr>
+        </p:nvSpPr>
+        <p:spPr/>
+        <p:txBody>
+          <a:bodyPr/>
+          <a:lstStyle/>
+          <a:p>
+            <a:r>
+              <a:rPr lang="en-US" dirty="0"/>
+              <a:t>Differentially Private SGD</a:t>
+            </a:r>
+          </a:p>
+        </p:txBody>
+      </p:sp>
+      <p:pic>
+        <p:nvPicPr>
+          <p:cNvPr id="4" name="Picture 3">
+            <a:extLst>
+              <a:ext uri="{FF2B5EF4-FFF2-40B4-BE49-F238E27FC236}">
+                <a16:creationId xmlns:a16="http://schemas.microsoft.com/office/drawing/2014/main" id="{323358DF-D48D-2042-8AC1-F78D535A4BF3}"/>
+              </a:ext>
+            </a:extLst>
+          </p:cNvPr>
+          <p:cNvPicPr>
+            <a:picLocks noChangeAspect="1"/>
+          </p:cNvPicPr>
+          <p:nvPr/>
+        </p:nvPicPr>
+        <p:blipFill>
+          <a:blip r:embed="rId2"/>
+          <a:stretch>
+            <a:fillRect/>
+          </a:stretch>
+        </p:blipFill>
+        <p:spPr>
+          <a:xfrm>
+            <a:off x="1043491" y="2582590"/>
+            <a:ext cx="9750014" cy="2837407"/>
+          </a:xfrm>
+          <a:prstGeom prst="rect">
+            <a:avLst/>
+          </a:prstGeom>
+        </p:spPr>
+      </p:pic>
+      <p:sp>
+        <p:nvSpPr>
+          <p:cNvPr id="13" name="Rectangle 12">
+            <a:extLst>
+              <a:ext uri="{FF2B5EF4-FFF2-40B4-BE49-F238E27FC236}">
+                <a16:creationId xmlns:a16="http://schemas.microsoft.com/office/drawing/2014/main" id="{124B5F6B-F009-1D43-8261-CA9F6C511B02}"/>
+              </a:ext>
+            </a:extLst>
+          </p:cNvPr>
+          <p:cNvSpPr/>
+          <p:nvPr/>
+        </p:nvSpPr>
+        <p:spPr>
+          <a:xfrm>
+            <a:off x="129092" y="4109421"/>
+            <a:ext cx="1420009" cy="1581374"/>
+          </a:xfrm>
+          <a:prstGeom prst="rect">
+            <a:avLst/>
+          </a:prstGeom>
+          <a:solidFill>
+            <a:schemeClr val="bg1"/>
+          </a:solidFill>
+          <a:ln>
+            <a:solidFill>
+              <a:schemeClr val="bg1"/>
+            </a:solidFill>
+          </a:ln>
+        </p:spPr>
+        <p:style>
+          <a:lnRef idx="2">
+            <a:schemeClr val="accent1">
+              <a:shade val="50000"/>
+            </a:schemeClr>
+          </a:lnRef>
+          <a:fillRef idx="1">
+            <a:schemeClr val="accent1"/>
+          </a:fillRef>
+          <a:effectRef idx="0">
+            <a:schemeClr val="accent1"/>
+          </a:effectRef>
+          <a:fontRef idx="minor">
+            <a:schemeClr val="lt1"/>
+          </a:fontRef>
+        </p:style>
+        <p:txBody>
+          <a:bodyPr rtlCol="0" anchor="ctr"/>
+          <a:lstStyle/>
+          <a:p>
+            <a:pPr algn="ctr"/>
+            <a:endParaRPr lang="en-US"/>
+          </a:p>
+        </p:txBody>
+      </p:sp>
+      <p:sp>
+        <p:nvSpPr>
+          <p:cNvPr id="14" name="Rectangle 13">
+            <a:extLst>
+              <a:ext uri="{FF2B5EF4-FFF2-40B4-BE49-F238E27FC236}">
+                <a16:creationId xmlns:a16="http://schemas.microsoft.com/office/drawing/2014/main" id="{7FF5BA59-1489-254C-B446-54EB336234F6}"/>
+              </a:ext>
+            </a:extLst>
+          </p:cNvPr>
+          <p:cNvSpPr/>
+          <p:nvPr/>
+        </p:nvSpPr>
+        <p:spPr>
+          <a:xfrm>
+            <a:off x="281492" y="4261821"/>
+            <a:ext cx="1420009" cy="1581374"/>
+          </a:xfrm>
+          <a:prstGeom prst="rect">
+            <a:avLst/>
+          </a:prstGeom>
+          <a:solidFill>
+            <a:schemeClr val="bg1"/>
+          </a:solidFill>
+          <a:ln>
+            <a:solidFill>
+              <a:schemeClr val="bg1"/>
+            </a:solidFill>
+          </a:ln>
+        </p:spPr>
+        <p:style>
+          <a:lnRef idx="2">
+            <a:schemeClr val="accent1">
+              <a:shade val="50000"/>
+            </a:schemeClr>
+          </a:lnRef>
+          <a:fillRef idx="1">
+            <a:schemeClr val="accent1"/>
+          </a:fillRef>
+          <a:effectRef idx="0">
+            <a:schemeClr val="accent1"/>
+          </a:effectRef>
+          <a:fontRef idx="minor">
+            <a:schemeClr val="lt1"/>
+          </a:fontRef>
+        </p:style>
+        <p:txBody>
+          <a:bodyPr rtlCol="0" anchor="ctr"/>
+          <a:lstStyle/>
+          <a:p>
+            <a:pPr algn="ctr"/>
+            <a:endParaRPr lang="en-US"/>
+          </a:p>
+        </p:txBody>
+      </p:sp>
+      <p:sp>
+        <p:nvSpPr>
+          <p:cNvPr id="15" name="Rectangle 14">
+            <a:extLst>
+              <a:ext uri="{FF2B5EF4-FFF2-40B4-BE49-F238E27FC236}">
+                <a16:creationId xmlns:a16="http://schemas.microsoft.com/office/drawing/2014/main" id="{9B5459D5-6298-8442-BE9C-34383FF96751}"/>
+              </a:ext>
+            </a:extLst>
+          </p:cNvPr>
+          <p:cNvSpPr/>
+          <p:nvPr/>
+        </p:nvSpPr>
+        <p:spPr>
+          <a:xfrm>
+            <a:off x="453614" y="1693233"/>
+            <a:ext cx="1420009" cy="1581374"/>
+          </a:xfrm>
+          <a:prstGeom prst="rect">
+            <a:avLst/>
+          </a:prstGeom>
+          <a:solidFill>
+            <a:schemeClr val="bg1"/>
+          </a:solidFill>
+          <a:ln>
+            <a:solidFill>
+              <a:schemeClr val="bg1"/>
+            </a:solidFill>
+          </a:ln>
+        </p:spPr>
+        <p:style>
+          <a:lnRef idx="2">
+            <a:schemeClr val="accent1">
+              <a:shade val="50000"/>
+            </a:schemeClr>
+          </a:lnRef>
+          <a:fillRef idx="1">
+            <a:schemeClr val="accent1"/>
+          </a:fillRef>
+          <a:effectRef idx="0">
+            <a:schemeClr val="accent1"/>
+          </a:effectRef>
+          <a:fontRef idx="minor">
+            <a:schemeClr val="lt1"/>
+          </a:fontRef>
+        </p:style>
+        <p:txBody>
+          <a:bodyPr rtlCol="0" anchor="ctr"/>
+          <a:lstStyle/>
+          <a:p>
+            <a:pPr algn="ctr"/>
+            <a:endParaRPr lang="en-US"/>
+          </a:p>
+        </p:txBody>
+      </p:sp>
+    </p:spTree>
+    <p:extLst>
+      <p:ext uri="{BB962C8B-B14F-4D97-AF65-F5344CB8AC3E}">
+        <p14:creationId xmlns:p14="http://schemas.microsoft.com/office/powerpoint/2010/main" val="641800523"/>
+      </p:ext>
+    </p:extLst>
+  </p:cSld>
+  <p:clrMapOvr>
+    <a:masterClrMapping/>
+  </p:clrMapOvr>
+</p:sld>
+</file>
+
+<file path=ppt/slides/slide5.xml><?xml version="1.0" encoding="utf-8"?>
 <p:sld xmlns:a="http://schemas.openxmlformats.org/drawingml/2006/main" xmlns:r="http://schemas.openxmlformats.org/officeDocument/2006/relationships" xmlns:p="http://schemas.openxmlformats.org/presentationml/2006/main">
   <p:cSld>
     <p:spTree>
@@ -6493,7 +7637,7 @@
 </p:sld>
 </file>
 
-<file path=ppt/slides/slide5.xml><?xml version="1.0" encoding="utf-8"?>
+<file path=ppt/slides/slide6.xml><?xml version="1.0" encoding="utf-8"?>
 <p:sld xmlns:a="http://schemas.openxmlformats.org/drawingml/2006/main" xmlns:r="http://schemas.openxmlformats.org/officeDocument/2006/relationships" xmlns:p="http://schemas.openxmlformats.org/presentationml/2006/main">
   <p:cSld>
     <p:spTree>
@@ -6562,7 +7706,7 @@
           <a:p>
             <a:r>
               <a:rPr lang="en-US" dirty="0"/>
-              <a:t>Norm clipping</a:t>
+              <a:t>Norm clipping, adding noise</a:t>
             </a:r>
           </a:p>
           <a:p>
@@ -6622,7 +7766,7 @@
 </p:sld>
 </file>
 
-<file path=ppt/slides/slide6.xml><?xml version="1.0" encoding="utf-8"?>
+<file path=ppt/slides/slide7.xml><?xml version="1.0" encoding="utf-8"?>
 <p:sld xmlns:a="http://schemas.openxmlformats.org/drawingml/2006/main" xmlns:r="http://schemas.openxmlformats.org/officeDocument/2006/relationships" xmlns:p="http://schemas.openxmlformats.org/presentationml/2006/main">
   <p:cSld>
     <p:spTree>
@@ -6668,8 +7812,8 @@
           </a:p>
         </p:txBody>
       </p:sp>
-      <mc:AlternateContent xmlns:mc="http://schemas.openxmlformats.org/markup-compatibility/2006">
-        <mc:Choice xmlns:a14="http://schemas.microsoft.com/office/drawing/2010/main" Requires="a14">
+      <mc:AlternateContent xmlns:mc="http://schemas.openxmlformats.org/markup-compatibility/2006" xmlns:a14="http://schemas.microsoft.com/office/drawing/2010/main">
+        <mc:Choice Requires="a14">
           <p:sp>
             <p:nvSpPr>
               <p:cNvPr id="9" name="Content Placeholder 2">
@@ -7141,7 +8285,7 @@
             </p:txBody>
           </p:sp>
         </mc:Choice>
-        <mc:Fallback>
+        <mc:Fallback xmlns="">
           <p:sp>
             <p:nvSpPr>
               <p:cNvPr id="9" name="Content Placeholder 2">
@@ -7228,7 +8372,7 @@
 </p:sld>
 </file>
 
-<file path=ppt/slides/slide7.xml><?xml version="1.0" encoding="utf-8"?>
+<file path=ppt/slides/slide8.xml><?xml version="1.0" encoding="utf-8"?>
 <p:sld xmlns:a="http://schemas.openxmlformats.org/drawingml/2006/main" xmlns:r="http://schemas.openxmlformats.org/officeDocument/2006/relationships" xmlns:p="http://schemas.openxmlformats.org/presentationml/2006/main">
   <p:cSld>
     <p:spTree>
@@ -7347,122 +8491,6 @@
 </p:sld>
 </file>
 
-<file path=ppt/slides/slide8.xml><?xml version="1.0" encoding="utf-8"?>
-<p:sld xmlns:a="http://schemas.openxmlformats.org/drawingml/2006/main" xmlns:r="http://schemas.openxmlformats.org/officeDocument/2006/relationships" xmlns:p="http://schemas.openxmlformats.org/presentationml/2006/main">
-  <p:cSld>
-    <p:spTree>
-      <p:nvGrpSpPr>
-        <p:cNvPr id="1" name=""/>
-        <p:cNvGrpSpPr/>
-        <p:nvPr/>
-      </p:nvGrpSpPr>
-      <p:grpSpPr>
-        <a:xfrm>
-          <a:off x="0" y="0"/>
-          <a:ext cx="0" cy="0"/>
-          <a:chOff x="0" y="0"/>
-          <a:chExt cx="0" cy="0"/>
-        </a:xfrm>
-      </p:grpSpPr>
-      <p:sp>
-        <p:nvSpPr>
-          <p:cNvPr id="2" name="Title 1">
-            <a:extLst>
-              <a:ext uri="{FF2B5EF4-FFF2-40B4-BE49-F238E27FC236}">
-                <a16:creationId xmlns:a16="http://schemas.microsoft.com/office/drawing/2014/main" id="{7C52B8B9-0ABB-7B46-8201-19BE5174F4E1}"/>
-              </a:ext>
-            </a:extLst>
-          </p:cNvPr>
-          <p:cNvSpPr>
-            <a:spLocks noGrp="1"/>
-          </p:cNvSpPr>
-          <p:nvPr>
-            <p:ph type="title"/>
-          </p:nvPr>
-        </p:nvSpPr>
-        <p:spPr/>
-        <p:txBody>
-          <a:bodyPr/>
-          <a:lstStyle/>
-          <a:p>
-            <a:r>
-              <a:rPr lang="en-US" dirty="0"/>
-              <a:t>Key Contribution is Obtaining a Tighter Bound</a:t>
-            </a:r>
-          </a:p>
-        </p:txBody>
-      </p:sp>
-      <p:sp>
-        <p:nvSpPr>
-          <p:cNvPr id="3" name="Content Placeholder 2">
-            <a:extLst>
-              <a:ext uri="{FF2B5EF4-FFF2-40B4-BE49-F238E27FC236}">
-                <a16:creationId xmlns:a16="http://schemas.microsoft.com/office/drawing/2014/main" id="{BBC2A1AF-499C-334D-BC91-A60B0BF1290D}"/>
-              </a:ext>
-            </a:extLst>
-          </p:cNvPr>
-          <p:cNvSpPr>
-            <a:spLocks noGrp="1"/>
-          </p:cNvSpPr>
-          <p:nvPr>
-            <p:ph idx="1"/>
-          </p:nvPr>
-        </p:nvSpPr>
-        <p:spPr/>
-        <p:txBody>
-          <a:bodyPr/>
-          <a:lstStyle/>
-          <a:p>
-            <a:r>
-              <a:rPr lang="en-US" dirty="0"/>
-              <a:t>Solution: Use Moments Accountant to obtain this tighter bound</a:t>
-            </a:r>
-          </a:p>
-        </p:txBody>
-      </p:sp>
-      <p:pic>
-        <p:nvPicPr>
-          <p:cNvPr id="5" name="Picture 4">
-            <a:extLst>
-              <a:ext uri="{FF2B5EF4-FFF2-40B4-BE49-F238E27FC236}">
-                <a16:creationId xmlns:a16="http://schemas.microsoft.com/office/drawing/2014/main" id="{2B1EFE71-0F29-E144-871E-52945A2EF64B}"/>
-              </a:ext>
-            </a:extLst>
-          </p:cNvPr>
-          <p:cNvPicPr>
-            <a:picLocks noChangeAspect="1"/>
-          </p:cNvPicPr>
-          <p:nvPr/>
-        </p:nvPicPr>
-        <p:blipFill>
-          <a:blip r:embed="rId2"/>
-          <a:stretch>
-            <a:fillRect/>
-          </a:stretch>
-        </p:blipFill>
-        <p:spPr>
-          <a:xfrm>
-            <a:off x="1804236" y="2861632"/>
-            <a:ext cx="8583528" cy="3315331"/>
-          </a:xfrm>
-          <a:prstGeom prst="rect">
-            <a:avLst/>
-          </a:prstGeom>
-        </p:spPr>
-      </p:pic>
-    </p:spTree>
-    <p:extLst>
-      <p:ext uri="{BB962C8B-B14F-4D97-AF65-F5344CB8AC3E}">
-        <p14:creationId xmlns:p14="http://schemas.microsoft.com/office/powerpoint/2010/main" val="2298333675"/>
-      </p:ext>
-    </p:extLst>
-  </p:cSld>
-  <p:clrMapOvr>
-    <a:masterClrMapping/>
-  </p:clrMapOvr>
-</p:sld>
-</file>
-
 <file path=ppt/slides/slide9.xml><?xml version="1.0" encoding="utf-8"?>
 <p:sld xmlns:a="http://schemas.openxmlformats.org/drawingml/2006/main" xmlns:r="http://schemas.openxmlformats.org/officeDocument/2006/relationships" xmlns:p="http://schemas.openxmlformats.org/presentationml/2006/main">
   <p:cSld>
@@ -7485,7 +8513,7 @@
           <p:cNvPr id="2" name="Title 1">
             <a:extLst>
               <a:ext uri="{FF2B5EF4-FFF2-40B4-BE49-F238E27FC236}">
-                <a16:creationId xmlns:a16="http://schemas.microsoft.com/office/drawing/2014/main" id="{C43868BE-8F41-4248-94C0-54C87BAE1CCE}"/>
+                <a16:creationId xmlns:a16="http://schemas.microsoft.com/office/drawing/2014/main" id="{B4CB656D-7BBC-E042-BA0B-DFB5D5D04D45}"/>
               </a:ext>
             </a:extLst>
           </p:cNvPr>
@@ -7504,7 +8532,7 @@
             <a:pPr algn="ctr"/>
             <a:r>
               <a:rPr lang="en-US" dirty="0"/>
-              <a:t>Preliminary Definitions</a:t>
+              <a:t>Notice Sampling</a:t>
             </a:r>
           </a:p>
         </p:txBody>
@@ -7514,7 +8542,7 @@
           <p:cNvPr id="4" name="Picture 3">
             <a:extLst>
               <a:ext uri="{FF2B5EF4-FFF2-40B4-BE49-F238E27FC236}">
-                <a16:creationId xmlns:a16="http://schemas.microsoft.com/office/drawing/2014/main" id="{449DF8AB-8297-A845-ACD4-BB93BD80CCA3}"/>
+                <a16:creationId xmlns:a16="http://schemas.microsoft.com/office/drawing/2014/main" id="{703FB9FB-DBB1-884C-A77C-521E8A2454F8}"/>
               </a:ext>
             </a:extLst>
           </p:cNvPr>
@@ -7531,284 +8559,8 @@
         </p:blipFill>
         <p:spPr>
           <a:xfrm>
-            <a:off x="2988527" y="2417800"/>
-            <a:ext cx="6810236" cy="1011200"/>
-          </a:xfrm>
-          <a:prstGeom prst="rect">
-            <a:avLst/>
-          </a:prstGeom>
-        </p:spPr>
-      </p:pic>
-      <mc:AlternateContent xmlns:mc="http://schemas.openxmlformats.org/markup-compatibility/2006">
-        <mc:Choice xmlns:a14="http://schemas.microsoft.com/office/drawing/2010/main" Requires="a14">
-          <p:sp>
-            <p:nvSpPr>
-              <p:cNvPr id="5" name="TextBox 4">
-                <a:extLst>
-                  <a:ext uri="{FF2B5EF4-FFF2-40B4-BE49-F238E27FC236}">
-                    <a16:creationId xmlns:a16="http://schemas.microsoft.com/office/drawing/2014/main" id="{44ECC9EB-3FAB-7144-9D01-6F64D2C48284}"/>
-                  </a:ext>
-                </a:extLst>
-              </p:cNvPr>
-              <p:cNvSpPr txBox="1"/>
-              <p:nvPr/>
-            </p:nvSpPr>
-            <p:spPr>
-              <a:xfrm>
-                <a:off x="825190" y="2752297"/>
-                <a:ext cx="2308303" cy="369332"/>
-              </a:xfrm>
-              <a:prstGeom prst="rect">
-                <a:avLst/>
-              </a:prstGeom>
-              <a:noFill/>
-            </p:spPr>
-            <p:txBody>
-              <a:bodyPr wrap="square" rtlCol="0">
-                <a:spAutoFit/>
-              </a:bodyPr>
-              <a:lstStyle/>
-              <a:p>
-                <a:r>
-                  <a:rPr lang="en-US" dirty="0"/>
-                  <a:t>Privacy Loss at </a:t>
-                </a:r>
-                <a14:m>
-                  <m:oMath xmlns:m="http://schemas.openxmlformats.org/officeDocument/2006/math">
-                    <m:r>
-                      <a:rPr lang="en-US" b="0" i="1" smtClean="0">
-                        <a:latin typeface="Cambria Math" panose="02040503050406030204" pitchFamily="18" charset="0"/>
-                      </a:rPr>
-                      <m:t>𝑜</m:t>
-                    </m:r>
-                    <m:r>
-                      <a:rPr lang="en-US" b="0" i="1" smtClean="0">
-                        <a:latin typeface="Cambria Math" panose="02040503050406030204" pitchFamily="18" charset="0"/>
-                      </a:rPr>
-                      <m:t>:</m:t>
-                    </m:r>
-                  </m:oMath>
-                </a14:m>
-                <a:endParaRPr lang="en-US" b="0" dirty="0"/>
-              </a:p>
-            </p:txBody>
-          </p:sp>
-        </mc:Choice>
-        <mc:Fallback>
-          <p:sp>
-            <p:nvSpPr>
-              <p:cNvPr id="5" name="TextBox 4">
-                <a:extLst>
-                  <a:ext uri="{FF2B5EF4-FFF2-40B4-BE49-F238E27FC236}">
-                    <a16:creationId xmlns:a16="http://schemas.microsoft.com/office/drawing/2014/main" id="{44ECC9EB-3FAB-7144-9D01-6F64D2C48284}"/>
-                  </a:ext>
-                </a:extLst>
-              </p:cNvPr>
-              <p:cNvSpPr txBox="1">
-                <a:spLocks noRot="1" noChangeAspect="1" noMove="1" noResize="1" noEditPoints="1" noAdjustHandles="1" noChangeArrowheads="1" noChangeShapeType="1" noTextEdit="1"/>
-              </p:cNvSpPr>
-              <p:nvPr/>
-            </p:nvSpPr>
-            <p:spPr>
-              <a:xfrm>
-                <a:off x="825190" y="2752297"/>
-                <a:ext cx="2308303" cy="369332"/>
-              </a:xfrm>
-              <a:prstGeom prst="rect">
-                <a:avLst/>
-              </a:prstGeom>
-              <a:blipFill>
-                <a:blip r:embed="rId3"/>
-                <a:stretch>
-                  <a:fillRect l="-2186" t="-6667" b="-23333"/>
-                </a:stretch>
-              </a:blipFill>
-            </p:spPr>
-            <p:txBody>
-              <a:bodyPr/>
-              <a:lstStyle/>
-              <a:p>
-                <a:r>
-                  <a:rPr lang="en-US">
-                    <a:noFill/>
-                  </a:rPr>
-                  <a:t> </a:t>
-                </a:r>
-              </a:p>
-            </p:txBody>
-          </p:sp>
-        </mc:Fallback>
-      </mc:AlternateContent>
-      <mc:AlternateContent xmlns:mc="http://schemas.openxmlformats.org/markup-compatibility/2006">
-        <mc:Choice xmlns:a14="http://schemas.microsoft.com/office/drawing/2010/main" Requires="a14">
-          <p:sp>
-            <p:nvSpPr>
-              <p:cNvPr id="7" name="TextBox 6">
-                <a:extLst>
-                  <a:ext uri="{FF2B5EF4-FFF2-40B4-BE49-F238E27FC236}">
-                    <a16:creationId xmlns:a16="http://schemas.microsoft.com/office/drawing/2014/main" id="{16445E57-BE1C-6847-9B15-F91410591E92}"/>
-                  </a:ext>
-                </a:extLst>
-              </p:cNvPr>
-              <p:cNvSpPr txBox="1"/>
-              <p:nvPr/>
-            </p:nvSpPr>
-            <p:spPr>
-              <a:xfrm>
-                <a:off x="925551" y="3702205"/>
-                <a:ext cx="2062976" cy="923330"/>
-              </a:xfrm>
-              <a:prstGeom prst="rect">
-                <a:avLst/>
-              </a:prstGeom>
-              <a:noFill/>
-            </p:spPr>
-            <p:txBody>
-              <a:bodyPr wrap="square" rtlCol="0">
-                <a:spAutoFit/>
-              </a:bodyPr>
-              <a:lstStyle/>
-              <a:p>
-                <a14:m>
-                  <m:oMath xmlns:m="http://schemas.openxmlformats.org/officeDocument/2006/math">
-                    <m:r>
-                      <m:rPr>
-                        <m:sty m:val="p"/>
-                      </m:rPr>
-                      <a:rPr lang="en-US" b="0" i="1" smtClean="0">
-                        <a:latin typeface="Cambria Math" panose="02040503050406030204" pitchFamily="18" charset="0"/>
-                      </a:rPr>
-                      <m:t>λ</m:t>
-                    </m:r>
-                  </m:oMath>
-                </a14:m>
-                <a:r>
-                  <a:rPr lang="en-US" b="0" dirty="0"/>
-                  <a:t>-th moment of </a:t>
-                </a:r>
-                <a14:m>
-                  <m:oMath xmlns:m="http://schemas.openxmlformats.org/officeDocument/2006/math">
-                    <m:r>
-                      <a:rPr lang="en-US" b="0" i="1" smtClean="0">
-                        <a:latin typeface="Cambria Math" panose="02040503050406030204" pitchFamily="18" charset="0"/>
-                      </a:rPr>
-                      <m:t>ℳ</m:t>
-                    </m:r>
-                  </m:oMath>
-                </a14:m>
-                <a:endParaRPr lang="en-US" b="0" dirty="0"/>
-              </a:p>
-              <a:p>
-                <a:r>
-                  <a:rPr lang="en-US" b="0" dirty="0"/>
-                  <a:t>  </a:t>
-                </a:r>
-              </a:p>
-              <a:p>
-                <a:endParaRPr lang="en-US" b="0" dirty="0"/>
-              </a:p>
-            </p:txBody>
-          </p:sp>
-        </mc:Choice>
-        <mc:Fallback>
-          <p:sp>
-            <p:nvSpPr>
-              <p:cNvPr id="7" name="TextBox 6">
-                <a:extLst>
-                  <a:ext uri="{FF2B5EF4-FFF2-40B4-BE49-F238E27FC236}">
-                    <a16:creationId xmlns:a16="http://schemas.microsoft.com/office/drawing/2014/main" id="{16445E57-BE1C-6847-9B15-F91410591E92}"/>
-                  </a:ext>
-                </a:extLst>
-              </p:cNvPr>
-              <p:cNvSpPr txBox="1">
-                <a:spLocks noRot="1" noChangeAspect="1" noMove="1" noResize="1" noEditPoints="1" noAdjustHandles="1" noChangeArrowheads="1" noChangeShapeType="1" noTextEdit="1"/>
-              </p:cNvSpPr>
-              <p:nvPr/>
-            </p:nvSpPr>
-            <p:spPr>
-              <a:xfrm>
-                <a:off x="925551" y="3702205"/>
-                <a:ext cx="2062976" cy="923330"/>
-              </a:xfrm>
-              <a:prstGeom prst="rect">
-                <a:avLst/>
-              </a:prstGeom>
-              <a:blipFill>
-                <a:blip r:embed="rId4"/>
-                <a:stretch>
-                  <a:fillRect t="-2740"/>
-                </a:stretch>
-              </a:blipFill>
-            </p:spPr>
-            <p:txBody>
-              <a:bodyPr/>
-              <a:lstStyle/>
-              <a:p>
-                <a:r>
-                  <a:rPr lang="en-US">
-                    <a:noFill/>
-                  </a:rPr>
-                  <a:t> </a:t>
-                </a:r>
-              </a:p>
-            </p:txBody>
-          </p:sp>
-        </mc:Fallback>
-      </mc:AlternateContent>
-      <p:pic>
-        <p:nvPicPr>
-          <p:cNvPr id="12" name="Picture 11">
-            <a:extLst>
-              <a:ext uri="{FF2B5EF4-FFF2-40B4-BE49-F238E27FC236}">
-                <a16:creationId xmlns:a16="http://schemas.microsoft.com/office/drawing/2014/main" id="{100DAD3F-3468-BE46-83FE-4414A09EFA7B}"/>
-              </a:ext>
-            </a:extLst>
-          </p:cNvPr>
-          <p:cNvPicPr>
-            <a:picLocks noChangeAspect="1"/>
-          </p:cNvPicPr>
-          <p:nvPr/>
-        </p:nvPicPr>
-        <p:blipFill>
-          <a:blip r:embed="rId5"/>
-          <a:stretch>
-            <a:fillRect/>
-          </a:stretch>
-        </p:blipFill>
-        <p:spPr>
-          <a:xfrm>
-            <a:off x="2988527" y="3439116"/>
-            <a:ext cx="8590665" cy="1234625"/>
-          </a:xfrm>
-          <a:prstGeom prst="rect">
-            <a:avLst/>
-          </a:prstGeom>
-        </p:spPr>
-      </p:pic>
-      <p:pic>
-        <p:nvPicPr>
-          <p:cNvPr id="13" name="Picture 12">
-            <a:extLst>
-              <a:ext uri="{FF2B5EF4-FFF2-40B4-BE49-F238E27FC236}">
-                <a16:creationId xmlns:a16="http://schemas.microsoft.com/office/drawing/2014/main" id="{BD9BB90C-120B-0547-AFEE-09A9D4CEEA07}"/>
-              </a:ext>
-            </a:extLst>
-          </p:cNvPr>
-          <p:cNvPicPr>
-            <a:picLocks noChangeAspect="1"/>
-          </p:cNvPicPr>
-          <p:nvPr/>
-        </p:nvPicPr>
-        <p:blipFill>
-          <a:blip r:embed="rId6"/>
-          <a:stretch>
-            <a:fillRect/>
-          </a:stretch>
-        </p:blipFill>
-        <p:spPr>
-          <a:xfrm>
-            <a:off x="2988527" y="4946946"/>
-            <a:ext cx="5429645" cy="967784"/>
+            <a:off x="1396145" y="2050303"/>
+            <a:ext cx="9399710" cy="3629734"/>
           </a:xfrm>
           <a:prstGeom prst="rect">
             <a:avLst/>
@@ -7818,7 +8570,7 @@
     </p:spTree>
     <p:extLst>
       <p:ext uri="{BB962C8B-B14F-4D97-AF65-F5344CB8AC3E}">
-        <p14:creationId xmlns:p14="http://schemas.microsoft.com/office/powerpoint/2010/main" val="3459330158"/>
+        <p14:creationId xmlns:p14="http://schemas.microsoft.com/office/powerpoint/2010/main" val="473329030"/>
       </p:ext>
     </p:extLst>
   </p:cSld>
